--- a/documents/중간보고/2026QI_WeValue우리가치 중간보고.pptx
+++ b/documents/중간보고/2026QI_WeValue우리가치 중간보고.pptx
@@ -5,18 +5,17 @@
     <p:sldMasterId id="2147483660" r:id="rId1"/>
   </p:sldMasterIdLst>
   <p:notesMasterIdLst>
-    <p:notesMasterId r:id="rId11"/>
+    <p:notesMasterId r:id="rId10"/>
   </p:notesMasterIdLst>
   <p:sldIdLst>
     <p:sldId id="256" r:id="rId2"/>
     <p:sldId id="269" r:id="rId3"/>
     <p:sldId id="310" r:id="rId4"/>
     <p:sldId id="311" r:id="rId5"/>
-    <p:sldId id="315" r:id="rId6"/>
-    <p:sldId id="312" r:id="rId7"/>
-    <p:sldId id="313" r:id="rId8"/>
-    <p:sldId id="314" r:id="rId9"/>
-    <p:sldId id="294" r:id="rId10"/>
+    <p:sldId id="312" r:id="rId6"/>
+    <p:sldId id="313" r:id="rId7"/>
+    <p:sldId id="314" r:id="rId8"/>
+    <p:sldId id="294" r:id="rId9"/>
   </p:sldIdLst>
   <p:sldSz cx="12192000" cy="6858000"/>
   <p:notesSz cx="6858000" cy="9144000"/>
@@ -562,142 +561,7 @@
           <a:bodyPr/>
           <a:lstStyle/>
           <a:p>
-            <a:r>
-              <a:rPr lang="ko-KR" altLang="en-US" sz="500" dirty="0"/>
-              <a:t>안녕하십니까</a:t>
-            </a:r>
-            <a:r>
-              <a:rPr lang="en-US" altLang="ko-KR" sz="500" dirty="0"/>
-              <a:t>. 2026</a:t>
-            </a:r>
-            <a:r>
-              <a:rPr lang="ko-KR" altLang="en-US" sz="500" dirty="0"/>
-              <a:t>년 진료지원간호팀의 </a:t>
-            </a:r>
-            <a:r>
-              <a:rPr lang="en-US" altLang="ko-KR" sz="500" dirty="0"/>
-              <a:t>QI </a:t>
-            </a:r>
-            <a:r>
-              <a:rPr lang="ko-KR" altLang="en-US" sz="500" dirty="0"/>
-              <a:t>활동</a:t>
-            </a:r>
-            <a:r>
-              <a:rPr lang="en-US" altLang="ko-KR" sz="500" dirty="0"/>
-              <a:t>, **‘</a:t>
-            </a:r>
-            <a:r>
-              <a:rPr lang="ko-KR" altLang="en-US" sz="500" dirty="0"/>
-              <a:t>이보다 더 좋을 순 없다</a:t>
-            </a:r>
-            <a:r>
-              <a:rPr lang="en-US" altLang="ko-KR" sz="500" dirty="0"/>
-              <a:t>! </a:t>
-            </a:r>
-            <a:r>
-              <a:rPr lang="ko-KR" altLang="en-US" sz="500" dirty="0"/>
-              <a:t>협업 기반 간호 현장’**의 발표를 맡은 이비인후과 전담간호사 이미자입니다</a:t>
-            </a:r>
-            <a:r>
-              <a:rPr lang="en-US" altLang="ko-KR" sz="500" dirty="0"/>
-              <a:t>.</a:t>
-            </a:r>
-          </a:p>
-          <a:p>
-            <a:r>
-              <a:rPr lang="ko-KR" altLang="en-US" sz="500" dirty="0"/>
-              <a:t>저희 프로젝트 </a:t>
-            </a:r>
-            <a:r>
-              <a:rPr lang="ko-KR" altLang="en-US" sz="500" dirty="0" err="1"/>
-              <a:t>팀명인</a:t>
-            </a:r>
-            <a:r>
-              <a:rPr lang="ko-KR" altLang="en-US" sz="500" dirty="0"/>
-              <a:t> **‘</a:t>
-            </a:r>
-            <a:r>
-              <a:rPr lang="en-US" altLang="ko-KR" sz="500" dirty="0" err="1"/>
-              <a:t>WeValue</a:t>
-            </a:r>
-            <a:r>
-              <a:rPr lang="en-US" altLang="ko-KR" sz="500" dirty="0"/>
-              <a:t>(</a:t>
-            </a:r>
-            <a:r>
-              <a:rPr lang="ko-KR" altLang="en-US" sz="500" dirty="0" err="1"/>
-              <a:t>우리가치</a:t>
-            </a:r>
-            <a:r>
-              <a:rPr lang="en-US" altLang="ko-KR" sz="500" dirty="0"/>
-              <a:t>)’**</a:t>
-            </a:r>
-            <a:r>
-              <a:rPr lang="ko-KR" altLang="en-US" sz="500" dirty="0"/>
-              <a:t>에는 두 가지 큰 의미가 담겨 있습니다</a:t>
-            </a:r>
-            <a:r>
-              <a:rPr lang="en-US" altLang="ko-KR" sz="500" dirty="0"/>
-              <a:t>. </a:t>
-            </a:r>
-            <a:r>
-              <a:rPr lang="ko-KR" altLang="en-US" sz="500" dirty="0"/>
-              <a:t>첫 번째는 진료지원간호사</a:t>
-            </a:r>
-            <a:r>
-              <a:rPr lang="en-US" altLang="ko-KR" sz="500" dirty="0"/>
-              <a:t>(PA)</a:t>
-            </a:r>
-            <a:r>
-              <a:rPr lang="ko-KR" altLang="en-US" sz="500" dirty="0"/>
-              <a:t>와 병동 간호사가 환자의 회복이라는 하나의 목표를 위해 </a:t>
-            </a:r>
-            <a:r>
-              <a:rPr lang="ko-KR" altLang="en-US" sz="500" b="1" dirty="0"/>
-              <a:t>‘우리 같이’</a:t>
-            </a:r>
-            <a:r>
-              <a:rPr lang="ko-KR" altLang="en-US" sz="500" dirty="0"/>
-              <a:t> 움직이는 든든한 파트너라는 뜻이며</a:t>
-            </a:r>
-            <a:r>
-              <a:rPr lang="en-US" altLang="ko-KR" sz="500" dirty="0"/>
-              <a:t>, </a:t>
-            </a:r>
-            <a:r>
-              <a:rPr lang="ko-KR" altLang="en-US" sz="500" dirty="0"/>
-              <a:t>두 번째는 우리 모두가 전문가로서 </a:t>
-            </a:r>
-            <a:r>
-              <a:rPr lang="ko-KR" altLang="en-US" sz="500" dirty="0" err="1"/>
-              <a:t>존중받는</a:t>
-            </a:r>
-            <a:r>
-              <a:rPr lang="ko-KR" altLang="en-US" sz="500" dirty="0"/>
-              <a:t> **‘우리의 가치’**를 함께 높여보자는 약속입니다</a:t>
-            </a:r>
-            <a:r>
-              <a:rPr lang="en-US" altLang="ko-KR" sz="500" dirty="0"/>
-              <a:t>.</a:t>
-            </a:r>
-          </a:p>
-          <a:p>
-            <a:r>
-              <a:rPr lang="ko-KR" altLang="en-US" sz="500" dirty="0"/>
-              <a:t>오늘 이 자리를 통해 우리 모두가 전문가로서의 자부심을 지키며</a:t>
-            </a:r>
-            <a:r>
-              <a:rPr lang="en-US" altLang="ko-KR" sz="500" dirty="0"/>
-              <a:t>, </a:t>
-            </a:r>
-            <a:r>
-              <a:rPr lang="ko-KR" altLang="en-US" sz="500" dirty="0"/>
-              <a:t>더 기분 좋게 일할 수 있는 협업 기반의 간호 현장을 함께 설계해보고자 합니다</a:t>
-            </a:r>
-            <a:r>
-              <a:rPr lang="en-US" altLang="ko-KR" sz="500" dirty="0"/>
-              <a:t>. </a:t>
-            </a:r>
+            <a:endParaRPr lang="en-US" altLang="ko-KR" sz="500" dirty="0"/>
           </a:p>
         </p:txBody>
       </p:sp>
@@ -781,26 +645,6 @@
           <a:bodyPr/>
           <a:lstStyle/>
           <a:p>
-            <a:r>
-              <a:rPr lang="en-US" altLang="ko-KR" sz="900" dirty="0"/>
-              <a:t>"</a:t>
-            </a:r>
-            <a:r>
-              <a:rPr lang="ko-KR" altLang="en-US" sz="900" dirty="0"/>
-              <a:t>오늘 간담회는 우리가 모인 취지를 공유하고</a:t>
-            </a:r>
-            <a:r>
-              <a:rPr lang="en-US" altLang="ko-KR" sz="900" dirty="0"/>
-              <a:t>, </a:t>
-            </a:r>
-            <a:r>
-              <a:rPr lang="ko-KR" altLang="en-US" sz="900" dirty="0"/>
-              <a:t>현장의 숙제들을 함께 살펴본 뒤 선생님들의 생생한 의견을 듣는 순서로 채워보고자 합니다</a:t>
-            </a:r>
-            <a:r>
-              <a:rPr lang="en-US" altLang="ko-KR" sz="900" dirty="0"/>
-              <a:t>."</a:t>
-            </a:r>
             <a:endParaRPr lang="ko-KR" altLang="en-US" sz="900" dirty="0"/>
           </a:p>
         </p:txBody>
@@ -885,591 +729,6 @@
           <a:bodyPr/>
           <a:lstStyle/>
           <a:p>
-            <a:r>
-              <a:rPr lang="en-US" altLang="ko-KR" sz="800" dirty="0"/>
-              <a:t>"</a:t>
-            </a:r>
-            <a:r>
-              <a:rPr lang="ko-KR" altLang="en-US" sz="800" dirty="0"/>
-              <a:t>우리는 환자의 회복이라는 같은 목표를 가진 든든한 파트너입니다</a:t>
-            </a:r>
-            <a:r>
-              <a:rPr lang="en-US" altLang="ko-KR" sz="800" dirty="0"/>
-              <a:t>. </a:t>
-            </a:r>
-            <a:r>
-              <a:rPr lang="ko-KR" altLang="en-US" sz="800" dirty="0"/>
-              <a:t>하지만 현장의 바쁜 흐름 속에서 소통의 빈틈이 생길 때마다 마음이 </a:t>
-            </a:r>
-            <a:r>
-              <a:rPr lang="ko-KR" altLang="en-US" sz="800" dirty="0" err="1"/>
-              <a:t>무거우셨으리라</a:t>
-            </a:r>
-            <a:r>
-              <a:rPr lang="ko-KR" altLang="en-US" sz="800" dirty="0"/>
-              <a:t> 생각합니다</a:t>
-            </a:r>
-            <a:r>
-              <a:rPr lang="en-US" altLang="ko-KR" sz="800" dirty="0"/>
-              <a:t>. </a:t>
-            </a:r>
-            <a:r>
-              <a:rPr lang="ko-KR" altLang="en-US" sz="800" dirty="0"/>
-              <a:t>오늘 이 자리는</a:t>
-            </a:r>
-            <a:r>
-              <a:rPr lang="en-US" altLang="ko-KR" sz="800" dirty="0"/>
-              <a:t>, </a:t>
-            </a:r>
-            <a:r>
-              <a:rPr lang="ko-KR" altLang="en-US" sz="800" dirty="0"/>
-              <a:t>전문가로서의 자부심을 지키며 일할 수 있는 **‘우리만의 건강한 기준’**을 함께 고민해보기 위해 마련하였습니다</a:t>
-            </a:r>
-            <a:endParaRPr lang="en-US" altLang="ko-KR" sz="800" dirty="0"/>
-          </a:p>
-          <a:p>
-            <a:endParaRPr lang="en-US" altLang="ko-KR" sz="800" dirty="0"/>
-          </a:p>
-          <a:p>
-            <a:r>
-              <a:rPr lang="en-US" altLang="ko-KR" sz="800" dirty="0"/>
-              <a:t>."</a:t>
-            </a:r>
-            <a:r>
-              <a:rPr lang="ko-KR" altLang="en-US" sz="500" kern="1200" dirty="0">
-                <a:solidFill>
-                  <a:schemeClr val="tx1"/>
-                </a:solidFill>
-                <a:effectLst/>
-                <a:latin typeface="+mn-lt"/>
-                <a:ea typeface="+mn-ea"/>
-                <a:cs typeface="+mn-cs"/>
-              </a:rPr>
-              <a:t>본론으로 들어가기 전 가벼운 질문 하나 </a:t>
-            </a:r>
-            <a:r>
-              <a:rPr lang="ko-KR" altLang="en-US" sz="500" kern="1200" dirty="0" err="1">
-                <a:solidFill>
-                  <a:schemeClr val="tx1"/>
-                </a:solidFill>
-                <a:effectLst/>
-                <a:latin typeface="+mn-lt"/>
-                <a:ea typeface="+mn-ea"/>
-                <a:cs typeface="+mn-cs"/>
-              </a:rPr>
-              <a:t>드릴게요</a:t>
-            </a:r>
-            <a:r>
-              <a:rPr lang="en-US" altLang="ko-KR" sz="500" kern="1200" dirty="0">
-                <a:solidFill>
-                  <a:schemeClr val="tx1"/>
-                </a:solidFill>
-                <a:effectLst/>
-                <a:latin typeface="+mn-lt"/>
-                <a:ea typeface="+mn-ea"/>
-                <a:cs typeface="+mn-cs"/>
-              </a:rPr>
-              <a:t>. </a:t>
-            </a:r>
-            <a:r>
-              <a:rPr lang="ko-KR" altLang="en-US" sz="500" kern="1200" dirty="0">
-                <a:solidFill>
-                  <a:schemeClr val="tx1"/>
-                </a:solidFill>
-                <a:effectLst/>
-                <a:latin typeface="+mn-lt"/>
-                <a:ea typeface="+mn-ea"/>
-                <a:cs typeface="+mn-cs"/>
-              </a:rPr>
-              <a:t>오늘 업무하시면서 </a:t>
-            </a:r>
-            <a:r>
-              <a:rPr lang="en-US" altLang="ko-KR" sz="500" kern="1200" dirty="0">
-                <a:solidFill>
-                  <a:schemeClr val="tx1"/>
-                </a:solidFill>
-                <a:effectLst/>
-                <a:latin typeface="+mn-lt"/>
-                <a:ea typeface="+mn-ea"/>
-                <a:cs typeface="+mn-cs"/>
-              </a:rPr>
-              <a:t>PA </a:t>
-            </a:r>
-            <a:r>
-              <a:rPr lang="ko-KR" altLang="en-US" sz="500" kern="1200" dirty="0">
-                <a:solidFill>
-                  <a:schemeClr val="tx1"/>
-                </a:solidFill>
-                <a:effectLst/>
-                <a:latin typeface="+mn-lt"/>
-                <a:ea typeface="+mn-ea"/>
-                <a:cs typeface="+mn-cs"/>
-              </a:rPr>
-              <a:t>선생님 혹은 병동 선생님과 소통할 때</a:t>
-            </a:r>
-            <a:r>
-              <a:rPr lang="en-US" altLang="ko-KR" sz="500" kern="1200" dirty="0">
-                <a:solidFill>
-                  <a:schemeClr val="tx1"/>
-                </a:solidFill>
-                <a:effectLst/>
-                <a:latin typeface="+mn-lt"/>
-                <a:ea typeface="+mn-ea"/>
-                <a:cs typeface="+mn-cs"/>
-              </a:rPr>
-              <a:t>, </a:t>
-            </a:r>
-            <a:r>
-              <a:rPr lang="en-US" altLang="ko-KR" sz="500" b="1" kern="1200" dirty="0">
-                <a:solidFill>
-                  <a:schemeClr val="tx1"/>
-                </a:solidFill>
-                <a:effectLst/>
-                <a:latin typeface="+mn-lt"/>
-                <a:ea typeface="+mn-ea"/>
-                <a:cs typeface="+mn-cs"/>
-              </a:rPr>
-              <a:t>'</a:t>
-            </a:r>
-            <a:r>
-              <a:rPr lang="ko-KR" altLang="en-US" sz="500" b="1" kern="1200" dirty="0">
-                <a:solidFill>
-                  <a:schemeClr val="tx1"/>
-                </a:solidFill>
-                <a:effectLst/>
-                <a:latin typeface="+mn-lt"/>
-                <a:ea typeface="+mn-ea"/>
-                <a:cs typeface="+mn-cs"/>
-              </a:rPr>
-              <a:t>아</a:t>
-            </a:r>
-            <a:r>
-              <a:rPr lang="en-US" altLang="ko-KR" sz="500" b="1" kern="1200" dirty="0">
-                <a:solidFill>
-                  <a:schemeClr val="tx1"/>
-                </a:solidFill>
-                <a:effectLst/>
-                <a:latin typeface="+mn-lt"/>
-                <a:ea typeface="+mn-ea"/>
-                <a:cs typeface="+mn-cs"/>
-              </a:rPr>
-              <a:t>, </a:t>
-            </a:r>
-            <a:r>
-              <a:rPr lang="ko-KR" altLang="en-US" sz="500" b="1" kern="1200" dirty="0">
-                <a:solidFill>
-                  <a:schemeClr val="tx1"/>
-                </a:solidFill>
-                <a:effectLst/>
-                <a:latin typeface="+mn-lt"/>
-                <a:ea typeface="+mn-ea"/>
-                <a:cs typeface="+mn-cs"/>
-              </a:rPr>
-              <a:t>이 말</a:t>
-            </a:r>
-            <a:r>
-              <a:rPr lang="en-US" altLang="ko-KR" sz="500" b="1" kern="1200" dirty="0">
-                <a:solidFill>
-                  <a:schemeClr val="tx1"/>
-                </a:solidFill>
-                <a:effectLst/>
-                <a:latin typeface="+mn-lt"/>
-                <a:ea typeface="+mn-ea"/>
-                <a:cs typeface="+mn-cs"/>
-              </a:rPr>
-              <a:t>(</a:t>
-            </a:r>
-            <a:r>
-              <a:rPr lang="ko-KR" altLang="en-US" sz="500" b="1" kern="1200" dirty="0">
-                <a:solidFill>
-                  <a:schemeClr val="tx1"/>
-                </a:solidFill>
-                <a:effectLst/>
-                <a:latin typeface="+mn-lt"/>
-                <a:ea typeface="+mn-ea"/>
-                <a:cs typeface="+mn-cs"/>
-              </a:rPr>
-              <a:t>혹은 이 행동</a:t>
-            </a:r>
-            <a:r>
-              <a:rPr lang="en-US" altLang="ko-KR" sz="500" b="1" kern="1200" dirty="0">
-                <a:solidFill>
-                  <a:schemeClr val="tx1"/>
-                </a:solidFill>
-                <a:effectLst/>
-                <a:latin typeface="+mn-lt"/>
-                <a:ea typeface="+mn-ea"/>
-                <a:cs typeface="+mn-cs"/>
-              </a:rPr>
-              <a:t>) </a:t>
-            </a:r>
-            <a:r>
-              <a:rPr lang="ko-KR" altLang="en-US" sz="500" b="1" kern="1200" dirty="0">
-                <a:solidFill>
-                  <a:schemeClr val="tx1"/>
-                </a:solidFill>
-                <a:effectLst/>
-                <a:latin typeface="+mn-lt"/>
-                <a:ea typeface="+mn-ea"/>
-                <a:cs typeface="+mn-cs"/>
-              </a:rPr>
-              <a:t>덕분에 한결 수월했다</a:t>
-            </a:r>
-            <a:r>
-              <a:rPr lang="en-US" altLang="ko-KR" sz="500" b="1" kern="1200" dirty="0">
-                <a:solidFill>
-                  <a:schemeClr val="tx1"/>
-                </a:solidFill>
-                <a:effectLst/>
-                <a:latin typeface="+mn-lt"/>
-                <a:ea typeface="+mn-ea"/>
-                <a:cs typeface="+mn-cs"/>
-              </a:rPr>
-              <a:t>!'</a:t>
-            </a:r>
-            <a:r>
-              <a:rPr lang="ko-KR" altLang="en-US" sz="500" kern="1200" dirty="0">
-                <a:solidFill>
-                  <a:schemeClr val="tx1"/>
-                </a:solidFill>
-                <a:effectLst/>
-                <a:latin typeface="+mn-lt"/>
-                <a:ea typeface="+mn-ea"/>
-                <a:cs typeface="+mn-cs"/>
-              </a:rPr>
-              <a:t>싶었던 순간이 </a:t>
-            </a:r>
-            <a:r>
-              <a:rPr lang="en-US" altLang="ko-KR" sz="500" kern="1200" dirty="0">
-                <a:solidFill>
-                  <a:schemeClr val="tx1"/>
-                </a:solidFill>
-                <a:effectLst/>
-                <a:latin typeface="+mn-lt"/>
-                <a:ea typeface="+mn-ea"/>
-                <a:cs typeface="+mn-cs"/>
-              </a:rPr>
-              <a:t>1</a:t>
-            </a:r>
-            <a:r>
-              <a:rPr lang="ko-KR" altLang="en-US" sz="500" kern="1200" dirty="0">
-                <a:solidFill>
-                  <a:schemeClr val="tx1"/>
-                </a:solidFill>
-                <a:effectLst/>
-                <a:latin typeface="+mn-lt"/>
-                <a:ea typeface="+mn-ea"/>
-                <a:cs typeface="+mn-cs"/>
-              </a:rPr>
-              <a:t>초라도 있으셨나요</a:t>
-            </a:r>
-            <a:r>
-              <a:rPr lang="en-US" altLang="ko-KR" sz="500" kern="1200" dirty="0">
-                <a:solidFill>
-                  <a:schemeClr val="tx1"/>
-                </a:solidFill>
-                <a:effectLst/>
-                <a:latin typeface="+mn-lt"/>
-                <a:ea typeface="+mn-ea"/>
-                <a:cs typeface="+mn-cs"/>
-              </a:rPr>
-              <a:t>?“</a:t>
-            </a:r>
-            <a:endParaRPr lang="ko-KR" altLang="en-US" sz="500" kern="1200" dirty="0">
-              <a:solidFill>
-                <a:schemeClr val="tx1"/>
-              </a:solidFill>
-              <a:effectLst/>
-              <a:latin typeface="+mn-lt"/>
-              <a:ea typeface="+mn-ea"/>
-              <a:cs typeface="+mn-cs"/>
-            </a:endParaRPr>
-          </a:p>
-          <a:p>
-            <a:pPr marL="0" marR="0" lvl="0" indent="0" algn="l" defTabSz="914400" rtl="0" eaLnBrk="1" fontAlgn="auto" latinLnBrk="1" hangingPunct="1">
-              <a:lnSpc>
-                <a:spcPct val="100000"/>
-              </a:lnSpc>
-              <a:spcBef>
-                <a:spcPts val="0"/>
-              </a:spcBef>
-              <a:spcAft>
-                <a:spcPts val="0"/>
-              </a:spcAft>
-              <a:buClrTx/>
-              <a:buSzTx/>
-              <a:buFontTx/>
-              <a:buNone/>
-              <a:tabLst/>
-              <a:defRPr/>
-            </a:pPr>
-            <a:r>
-              <a:rPr lang="ko-KR" altLang="en-US" sz="500" kern="1200" dirty="0">
-                <a:solidFill>
-                  <a:schemeClr val="tx1"/>
-                </a:solidFill>
-                <a:effectLst/>
-                <a:latin typeface="+mn-lt"/>
-                <a:ea typeface="+mn-ea"/>
-                <a:cs typeface="+mn-cs"/>
-              </a:rPr>
-              <a:t>우리 </a:t>
-            </a:r>
-            <a:r>
-              <a:rPr lang="ko-KR" altLang="en-US" sz="500" kern="1200" dirty="0" err="1">
-                <a:solidFill>
-                  <a:schemeClr val="tx1"/>
-                </a:solidFill>
-                <a:effectLst/>
-                <a:latin typeface="+mn-lt"/>
-                <a:ea typeface="+mn-ea"/>
-                <a:cs typeface="+mn-cs"/>
-              </a:rPr>
-              <a:t>팀명이</a:t>
-            </a:r>
-            <a:r>
-              <a:rPr lang="ko-KR" altLang="en-US" sz="500" kern="1200" dirty="0">
-                <a:solidFill>
-                  <a:schemeClr val="tx1"/>
-                </a:solidFill>
-                <a:effectLst/>
-                <a:latin typeface="+mn-lt"/>
-                <a:ea typeface="+mn-ea"/>
-                <a:cs typeface="+mn-cs"/>
-              </a:rPr>
-              <a:t> </a:t>
-            </a:r>
-            <a:r>
-              <a:rPr lang="en-US" altLang="ko-KR" sz="500" kern="1200" dirty="0">
-                <a:solidFill>
-                  <a:schemeClr val="tx1"/>
-                </a:solidFill>
-                <a:effectLst/>
-                <a:latin typeface="+mn-lt"/>
-                <a:ea typeface="+mn-ea"/>
-                <a:cs typeface="+mn-cs"/>
-              </a:rPr>
-              <a:t>'</a:t>
-            </a:r>
-            <a:r>
-              <a:rPr lang="ko-KR" altLang="en-US" sz="500" kern="1200" dirty="0" err="1">
-                <a:solidFill>
-                  <a:schemeClr val="tx1"/>
-                </a:solidFill>
-                <a:effectLst/>
-                <a:latin typeface="+mn-lt"/>
-                <a:ea typeface="+mn-ea"/>
-                <a:cs typeface="+mn-cs"/>
-              </a:rPr>
-              <a:t>우리가치</a:t>
-            </a:r>
-            <a:r>
-              <a:rPr lang="en-US" altLang="ko-KR" sz="500" kern="1200" dirty="0">
-                <a:solidFill>
-                  <a:schemeClr val="tx1"/>
-                </a:solidFill>
-                <a:effectLst/>
-                <a:latin typeface="+mn-lt"/>
-                <a:ea typeface="+mn-ea"/>
-                <a:cs typeface="+mn-cs"/>
-              </a:rPr>
-              <a:t>'</a:t>
-            </a:r>
-            <a:r>
-              <a:rPr lang="ko-KR" altLang="en-US" sz="500" kern="1200" dirty="0">
-                <a:solidFill>
-                  <a:schemeClr val="tx1"/>
-                </a:solidFill>
-                <a:effectLst/>
-                <a:latin typeface="+mn-lt"/>
-                <a:ea typeface="+mn-ea"/>
-                <a:cs typeface="+mn-cs"/>
-              </a:rPr>
-              <a:t>인 만큼 여쭤보고 싶습니다</a:t>
-            </a:r>
-            <a:r>
-              <a:rPr lang="en-US" altLang="ko-KR" sz="500" kern="1200" dirty="0">
-                <a:solidFill>
-                  <a:schemeClr val="tx1"/>
-                </a:solidFill>
-                <a:effectLst/>
-                <a:latin typeface="+mn-lt"/>
-                <a:ea typeface="+mn-ea"/>
-                <a:cs typeface="+mn-cs"/>
-              </a:rPr>
-              <a:t>. </a:t>
-            </a:r>
-            <a:r>
-              <a:rPr lang="ko-KR" altLang="en-US" sz="500" kern="1200" dirty="0">
-                <a:solidFill>
-                  <a:schemeClr val="tx1"/>
-                </a:solidFill>
-                <a:effectLst/>
-                <a:latin typeface="+mn-lt"/>
-                <a:ea typeface="+mn-ea"/>
-                <a:cs typeface="+mn-cs"/>
-              </a:rPr>
-              <a:t>선생님들이 생각하시기에 **</a:t>
-            </a:r>
-            <a:r>
-              <a:rPr lang="en-US" altLang="ko-KR" sz="500" kern="1200" dirty="0">
-                <a:solidFill>
-                  <a:schemeClr val="tx1"/>
-                </a:solidFill>
-                <a:effectLst/>
-                <a:latin typeface="+mn-lt"/>
-                <a:ea typeface="+mn-ea"/>
-                <a:cs typeface="+mn-cs"/>
-              </a:rPr>
-              <a:t>'</a:t>
-            </a:r>
-            <a:r>
-              <a:rPr lang="ko-KR" altLang="en-US" sz="500" kern="1200" dirty="0">
-                <a:solidFill>
-                  <a:schemeClr val="tx1"/>
-                </a:solidFill>
-                <a:effectLst/>
-                <a:latin typeface="+mn-lt"/>
-                <a:ea typeface="+mn-ea"/>
-                <a:cs typeface="+mn-cs"/>
-              </a:rPr>
-              <a:t>정말 기분 좋은 협업</a:t>
-            </a:r>
-            <a:r>
-              <a:rPr lang="en-US" altLang="ko-KR" sz="500" kern="1200" dirty="0">
-                <a:solidFill>
-                  <a:schemeClr val="tx1"/>
-                </a:solidFill>
-                <a:effectLst/>
-                <a:latin typeface="+mn-lt"/>
-                <a:ea typeface="+mn-ea"/>
-                <a:cs typeface="+mn-cs"/>
-              </a:rPr>
-              <a:t>'**</a:t>
-            </a:r>
-            <a:r>
-              <a:rPr lang="ko-KR" altLang="en-US" sz="500" kern="1200" dirty="0">
-                <a:solidFill>
-                  <a:schemeClr val="tx1"/>
-                </a:solidFill>
-                <a:effectLst/>
-                <a:latin typeface="+mn-lt"/>
-                <a:ea typeface="+mn-ea"/>
-                <a:cs typeface="+mn-cs"/>
-              </a:rPr>
-              <a:t>을 한 문장이나 단어로 표현한다면 무엇일까요</a:t>
-            </a:r>
-            <a:r>
-              <a:rPr lang="en-US" altLang="ko-KR" sz="500" kern="1200" dirty="0">
-                <a:solidFill>
-                  <a:schemeClr val="tx1"/>
-                </a:solidFill>
-                <a:effectLst/>
-                <a:latin typeface="+mn-lt"/>
-                <a:ea typeface="+mn-ea"/>
-                <a:cs typeface="+mn-cs"/>
-              </a:rPr>
-              <a:t>? </a:t>
-            </a:r>
-            <a:endParaRPr lang="ko-KR" altLang="en-US" sz="500" kern="1200" dirty="0">
-              <a:solidFill>
-                <a:schemeClr val="tx1"/>
-              </a:solidFill>
-              <a:effectLst/>
-              <a:latin typeface="+mn-lt"/>
-              <a:ea typeface="+mn-ea"/>
-              <a:cs typeface="+mn-cs"/>
-            </a:endParaRPr>
-          </a:p>
-          <a:p>
-            <a:pPr marL="0" marR="0" lvl="0" indent="0" algn="l" defTabSz="914400" rtl="0" eaLnBrk="1" fontAlgn="auto" latinLnBrk="1" hangingPunct="1">
-              <a:lnSpc>
-                <a:spcPct val="100000"/>
-              </a:lnSpc>
-              <a:spcBef>
-                <a:spcPts val="0"/>
-              </a:spcBef>
-              <a:spcAft>
-                <a:spcPts val="0"/>
-              </a:spcAft>
-              <a:buClrTx/>
-              <a:buSzTx/>
-              <a:buFontTx/>
-              <a:buNone/>
-              <a:tabLst/>
-              <a:defRPr/>
-            </a:pPr>
-            <a:r>
-              <a:rPr lang="en-US" altLang="ko-KR" sz="500" kern="1200" dirty="0">
-                <a:solidFill>
-                  <a:schemeClr val="tx1"/>
-                </a:solidFill>
-                <a:effectLst/>
-                <a:latin typeface="+mn-lt"/>
-                <a:ea typeface="+mn-ea"/>
-                <a:cs typeface="+mn-cs"/>
-              </a:rPr>
-              <a:t>"</a:t>
-            </a:r>
-            <a:r>
-              <a:rPr lang="ko-KR" altLang="en-US" sz="500" kern="1200" dirty="0">
-                <a:solidFill>
-                  <a:schemeClr val="tx1"/>
-                </a:solidFill>
-                <a:effectLst/>
-                <a:latin typeface="+mn-lt"/>
-                <a:ea typeface="+mn-ea"/>
-                <a:cs typeface="+mn-cs"/>
-              </a:rPr>
-              <a:t>최근 일주일 동안 협업하면서 서로에게 가장 많이 했던 말이 무엇인가요</a:t>
-            </a:r>
-            <a:r>
-              <a:rPr lang="en-US" altLang="ko-KR" sz="500" kern="1200" dirty="0">
-                <a:solidFill>
-                  <a:schemeClr val="tx1"/>
-                </a:solidFill>
-                <a:effectLst/>
-                <a:latin typeface="+mn-lt"/>
-                <a:ea typeface="+mn-ea"/>
-                <a:cs typeface="+mn-cs"/>
-              </a:rPr>
-              <a:t>? </a:t>
-            </a:r>
-            <a:r>
-              <a:rPr lang="ko-KR" altLang="en-US" sz="500" kern="1200" dirty="0">
-                <a:solidFill>
-                  <a:schemeClr val="tx1"/>
-                </a:solidFill>
-                <a:effectLst/>
-                <a:latin typeface="+mn-lt"/>
-                <a:ea typeface="+mn-ea"/>
-                <a:cs typeface="+mn-cs"/>
-              </a:rPr>
-              <a:t>혹시 그 말이 서로를 힘들게 하는 말은 아니었는지 오늘 함께 돌아보고자 합니다</a:t>
-            </a:r>
-            <a:r>
-              <a:rPr lang="en-US" altLang="ko-KR" sz="500" kern="1200" dirty="0">
-                <a:solidFill>
-                  <a:schemeClr val="tx1"/>
-                </a:solidFill>
-                <a:effectLst/>
-                <a:latin typeface="+mn-lt"/>
-                <a:ea typeface="+mn-ea"/>
-                <a:cs typeface="+mn-cs"/>
-              </a:rPr>
-              <a:t>.“</a:t>
-            </a:r>
-            <a:endParaRPr lang="ko-KR" altLang="en-US" sz="500" kern="1200" dirty="0">
-              <a:solidFill>
-                <a:schemeClr val="tx1"/>
-              </a:solidFill>
-              <a:effectLst/>
-              <a:latin typeface="+mn-lt"/>
-              <a:ea typeface="+mn-ea"/>
-              <a:cs typeface="+mn-cs"/>
-            </a:endParaRPr>
-          </a:p>
-          <a:p>
             <a:endParaRPr lang="ko-KR" altLang="en-US" sz="600" dirty="0"/>
           </a:p>
         </p:txBody>
@@ -1554,591 +813,6 @@
           <a:bodyPr/>
           <a:lstStyle/>
           <a:p>
-            <a:r>
-              <a:rPr lang="en-US" altLang="ko-KR" sz="800" dirty="0"/>
-              <a:t>"</a:t>
-            </a:r>
-            <a:r>
-              <a:rPr lang="ko-KR" altLang="en-US" sz="800" dirty="0"/>
-              <a:t>우리는 환자의 회복이라는 같은 목표를 가진 든든한 파트너입니다</a:t>
-            </a:r>
-            <a:r>
-              <a:rPr lang="en-US" altLang="ko-KR" sz="800" dirty="0"/>
-              <a:t>. </a:t>
-            </a:r>
-            <a:r>
-              <a:rPr lang="ko-KR" altLang="en-US" sz="800" dirty="0"/>
-              <a:t>하지만 현장의 바쁜 흐름 속에서 소통의 빈틈이 생길 때마다 마음이 </a:t>
-            </a:r>
-            <a:r>
-              <a:rPr lang="ko-KR" altLang="en-US" sz="800" dirty="0" err="1"/>
-              <a:t>무거우셨으리라</a:t>
-            </a:r>
-            <a:r>
-              <a:rPr lang="ko-KR" altLang="en-US" sz="800" dirty="0"/>
-              <a:t> 생각합니다</a:t>
-            </a:r>
-            <a:r>
-              <a:rPr lang="en-US" altLang="ko-KR" sz="800" dirty="0"/>
-              <a:t>. </a:t>
-            </a:r>
-            <a:r>
-              <a:rPr lang="ko-KR" altLang="en-US" sz="800" dirty="0"/>
-              <a:t>오늘 이 자리는</a:t>
-            </a:r>
-            <a:r>
-              <a:rPr lang="en-US" altLang="ko-KR" sz="800" dirty="0"/>
-              <a:t>, </a:t>
-            </a:r>
-            <a:r>
-              <a:rPr lang="ko-KR" altLang="en-US" sz="800" dirty="0"/>
-              <a:t>전문가로서의 자부심을 지키며 일할 수 있는 **‘우리만의 건강한 기준’**을 함께 고민해보기 위해 마련하였습니다</a:t>
-            </a:r>
-            <a:endParaRPr lang="en-US" altLang="ko-KR" sz="800" dirty="0"/>
-          </a:p>
-          <a:p>
-            <a:endParaRPr lang="en-US" altLang="ko-KR" sz="800" dirty="0"/>
-          </a:p>
-          <a:p>
-            <a:r>
-              <a:rPr lang="en-US" altLang="ko-KR" sz="800" dirty="0"/>
-              <a:t>."</a:t>
-            </a:r>
-            <a:r>
-              <a:rPr lang="ko-KR" altLang="en-US" sz="500" kern="1200" dirty="0">
-                <a:solidFill>
-                  <a:schemeClr val="tx1"/>
-                </a:solidFill>
-                <a:effectLst/>
-                <a:latin typeface="+mn-lt"/>
-                <a:ea typeface="+mn-ea"/>
-                <a:cs typeface="+mn-cs"/>
-              </a:rPr>
-              <a:t>본론으로 들어가기 전 가벼운 질문 하나 </a:t>
-            </a:r>
-            <a:r>
-              <a:rPr lang="ko-KR" altLang="en-US" sz="500" kern="1200" dirty="0" err="1">
-                <a:solidFill>
-                  <a:schemeClr val="tx1"/>
-                </a:solidFill>
-                <a:effectLst/>
-                <a:latin typeface="+mn-lt"/>
-                <a:ea typeface="+mn-ea"/>
-                <a:cs typeface="+mn-cs"/>
-              </a:rPr>
-              <a:t>드릴게요</a:t>
-            </a:r>
-            <a:r>
-              <a:rPr lang="en-US" altLang="ko-KR" sz="500" kern="1200" dirty="0">
-                <a:solidFill>
-                  <a:schemeClr val="tx1"/>
-                </a:solidFill>
-                <a:effectLst/>
-                <a:latin typeface="+mn-lt"/>
-                <a:ea typeface="+mn-ea"/>
-                <a:cs typeface="+mn-cs"/>
-              </a:rPr>
-              <a:t>. </a:t>
-            </a:r>
-            <a:r>
-              <a:rPr lang="ko-KR" altLang="en-US" sz="500" kern="1200" dirty="0">
-                <a:solidFill>
-                  <a:schemeClr val="tx1"/>
-                </a:solidFill>
-                <a:effectLst/>
-                <a:latin typeface="+mn-lt"/>
-                <a:ea typeface="+mn-ea"/>
-                <a:cs typeface="+mn-cs"/>
-              </a:rPr>
-              <a:t>오늘 업무하시면서 </a:t>
-            </a:r>
-            <a:r>
-              <a:rPr lang="en-US" altLang="ko-KR" sz="500" kern="1200" dirty="0">
-                <a:solidFill>
-                  <a:schemeClr val="tx1"/>
-                </a:solidFill>
-                <a:effectLst/>
-                <a:latin typeface="+mn-lt"/>
-                <a:ea typeface="+mn-ea"/>
-                <a:cs typeface="+mn-cs"/>
-              </a:rPr>
-              <a:t>PA </a:t>
-            </a:r>
-            <a:r>
-              <a:rPr lang="ko-KR" altLang="en-US" sz="500" kern="1200" dirty="0">
-                <a:solidFill>
-                  <a:schemeClr val="tx1"/>
-                </a:solidFill>
-                <a:effectLst/>
-                <a:latin typeface="+mn-lt"/>
-                <a:ea typeface="+mn-ea"/>
-                <a:cs typeface="+mn-cs"/>
-              </a:rPr>
-              <a:t>선생님 혹은 병동 선생님과 소통할 때</a:t>
-            </a:r>
-            <a:r>
-              <a:rPr lang="en-US" altLang="ko-KR" sz="500" kern="1200" dirty="0">
-                <a:solidFill>
-                  <a:schemeClr val="tx1"/>
-                </a:solidFill>
-                <a:effectLst/>
-                <a:latin typeface="+mn-lt"/>
-                <a:ea typeface="+mn-ea"/>
-                <a:cs typeface="+mn-cs"/>
-              </a:rPr>
-              <a:t>, </a:t>
-            </a:r>
-            <a:r>
-              <a:rPr lang="en-US" altLang="ko-KR" sz="500" b="1" kern="1200" dirty="0">
-                <a:solidFill>
-                  <a:schemeClr val="tx1"/>
-                </a:solidFill>
-                <a:effectLst/>
-                <a:latin typeface="+mn-lt"/>
-                <a:ea typeface="+mn-ea"/>
-                <a:cs typeface="+mn-cs"/>
-              </a:rPr>
-              <a:t>'</a:t>
-            </a:r>
-            <a:r>
-              <a:rPr lang="ko-KR" altLang="en-US" sz="500" b="1" kern="1200" dirty="0">
-                <a:solidFill>
-                  <a:schemeClr val="tx1"/>
-                </a:solidFill>
-                <a:effectLst/>
-                <a:latin typeface="+mn-lt"/>
-                <a:ea typeface="+mn-ea"/>
-                <a:cs typeface="+mn-cs"/>
-              </a:rPr>
-              <a:t>아</a:t>
-            </a:r>
-            <a:r>
-              <a:rPr lang="en-US" altLang="ko-KR" sz="500" b="1" kern="1200" dirty="0">
-                <a:solidFill>
-                  <a:schemeClr val="tx1"/>
-                </a:solidFill>
-                <a:effectLst/>
-                <a:latin typeface="+mn-lt"/>
-                <a:ea typeface="+mn-ea"/>
-                <a:cs typeface="+mn-cs"/>
-              </a:rPr>
-              <a:t>, </a:t>
-            </a:r>
-            <a:r>
-              <a:rPr lang="ko-KR" altLang="en-US" sz="500" b="1" kern="1200" dirty="0">
-                <a:solidFill>
-                  <a:schemeClr val="tx1"/>
-                </a:solidFill>
-                <a:effectLst/>
-                <a:latin typeface="+mn-lt"/>
-                <a:ea typeface="+mn-ea"/>
-                <a:cs typeface="+mn-cs"/>
-              </a:rPr>
-              <a:t>이 말</a:t>
-            </a:r>
-            <a:r>
-              <a:rPr lang="en-US" altLang="ko-KR" sz="500" b="1" kern="1200" dirty="0">
-                <a:solidFill>
-                  <a:schemeClr val="tx1"/>
-                </a:solidFill>
-                <a:effectLst/>
-                <a:latin typeface="+mn-lt"/>
-                <a:ea typeface="+mn-ea"/>
-                <a:cs typeface="+mn-cs"/>
-              </a:rPr>
-              <a:t>(</a:t>
-            </a:r>
-            <a:r>
-              <a:rPr lang="ko-KR" altLang="en-US" sz="500" b="1" kern="1200" dirty="0">
-                <a:solidFill>
-                  <a:schemeClr val="tx1"/>
-                </a:solidFill>
-                <a:effectLst/>
-                <a:latin typeface="+mn-lt"/>
-                <a:ea typeface="+mn-ea"/>
-                <a:cs typeface="+mn-cs"/>
-              </a:rPr>
-              <a:t>혹은 이 행동</a:t>
-            </a:r>
-            <a:r>
-              <a:rPr lang="en-US" altLang="ko-KR" sz="500" b="1" kern="1200" dirty="0">
-                <a:solidFill>
-                  <a:schemeClr val="tx1"/>
-                </a:solidFill>
-                <a:effectLst/>
-                <a:latin typeface="+mn-lt"/>
-                <a:ea typeface="+mn-ea"/>
-                <a:cs typeface="+mn-cs"/>
-              </a:rPr>
-              <a:t>) </a:t>
-            </a:r>
-            <a:r>
-              <a:rPr lang="ko-KR" altLang="en-US" sz="500" b="1" kern="1200" dirty="0">
-                <a:solidFill>
-                  <a:schemeClr val="tx1"/>
-                </a:solidFill>
-                <a:effectLst/>
-                <a:latin typeface="+mn-lt"/>
-                <a:ea typeface="+mn-ea"/>
-                <a:cs typeface="+mn-cs"/>
-              </a:rPr>
-              <a:t>덕분에 한결 수월했다</a:t>
-            </a:r>
-            <a:r>
-              <a:rPr lang="en-US" altLang="ko-KR" sz="500" b="1" kern="1200" dirty="0">
-                <a:solidFill>
-                  <a:schemeClr val="tx1"/>
-                </a:solidFill>
-                <a:effectLst/>
-                <a:latin typeface="+mn-lt"/>
-                <a:ea typeface="+mn-ea"/>
-                <a:cs typeface="+mn-cs"/>
-              </a:rPr>
-              <a:t>!'</a:t>
-            </a:r>
-            <a:r>
-              <a:rPr lang="ko-KR" altLang="en-US" sz="500" kern="1200" dirty="0">
-                <a:solidFill>
-                  <a:schemeClr val="tx1"/>
-                </a:solidFill>
-                <a:effectLst/>
-                <a:latin typeface="+mn-lt"/>
-                <a:ea typeface="+mn-ea"/>
-                <a:cs typeface="+mn-cs"/>
-              </a:rPr>
-              <a:t>싶었던 순간이 </a:t>
-            </a:r>
-            <a:r>
-              <a:rPr lang="en-US" altLang="ko-KR" sz="500" kern="1200" dirty="0">
-                <a:solidFill>
-                  <a:schemeClr val="tx1"/>
-                </a:solidFill>
-                <a:effectLst/>
-                <a:latin typeface="+mn-lt"/>
-                <a:ea typeface="+mn-ea"/>
-                <a:cs typeface="+mn-cs"/>
-              </a:rPr>
-              <a:t>1</a:t>
-            </a:r>
-            <a:r>
-              <a:rPr lang="ko-KR" altLang="en-US" sz="500" kern="1200" dirty="0">
-                <a:solidFill>
-                  <a:schemeClr val="tx1"/>
-                </a:solidFill>
-                <a:effectLst/>
-                <a:latin typeface="+mn-lt"/>
-                <a:ea typeface="+mn-ea"/>
-                <a:cs typeface="+mn-cs"/>
-              </a:rPr>
-              <a:t>초라도 있으셨나요</a:t>
-            </a:r>
-            <a:r>
-              <a:rPr lang="en-US" altLang="ko-KR" sz="500" kern="1200" dirty="0">
-                <a:solidFill>
-                  <a:schemeClr val="tx1"/>
-                </a:solidFill>
-                <a:effectLst/>
-                <a:latin typeface="+mn-lt"/>
-                <a:ea typeface="+mn-ea"/>
-                <a:cs typeface="+mn-cs"/>
-              </a:rPr>
-              <a:t>?“</a:t>
-            </a:r>
-            <a:endParaRPr lang="ko-KR" altLang="en-US" sz="500" kern="1200" dirty="0">
-              <a:solidFill>
-                <a:schemeClr val="tx1"/>
-              </a:solidFill>
-              <a:effectLst/>
-              <a:latin typeface="+mn-lt"/>
-              <a:ea typeface="+mn-ea"/>
-              <a:cs typeface="+mn-cs"/>
-            </a:endParaRPr>
-          </a:p>
-          <a:p>
-            <a:pPr marL="0" marR="0" lvl="0" indent="0" algn="l" defTabSz="914400" rtl="0" eaLnBrk="1" fontAlgn="auto" latinLnBrk="1" hangingPunct="1">
-              <a:lnSpc>
-                <a:spcPct val="100000"/>
-              </a:lnSpc>
-              <a:spcBef>
-                <a:spcPts val="0"/>
-              </a:spcBef>
-              <a:spcAft>
-                <a:spcPts val="0"/>
-              </a:spcAft>
-              <a:buClrTx/>
-              <a:buSzTx/>
-              <a:buFontTx/>
-              <a:buNone/>
-              <a:tabLst/>
-              <a:defRPr/>
-            </a:pPr>
-            <a:r>
-              <a:rPr lang="ko-KR" altLang="en-US" sz="500" kern="1200" dirty="0">
-                <a:solidFill>
-                  <a:schemeClr val="tx1"/>
-                </a:solidFill>
-                <a:effectLst/>
-                <a:latin typeface="+mn-lt"/>
-                <a:ea typeface="+mn-ea"/>
-                <a:cs typeface="+mn-cs"/>
-              </a:rPr>
-              <a:t>우리 </a:t>
-            </a:r>
-            <a:r>
-              <a:rPr lang="ko-KR" altLang="en-US" sz="500" kern="1200" dirty="0" err="1">
-                <a:solidFill>
-                  <a:schemeClr val="tx1"/>
-                </a:solidFill>
-                <a:effectLst/>
-                <a:latin typeface="+mn-lt"/>
-                <a:ea typeface="+mn-ea"/>
-                <a:cs typeface="+mn-cs"/>
-              </a:rPr>
-              <a:t>팀명이</a:t>
-            </a:r>
-            <a:r>
-              <a:rPr lang="ko-KR" altLang="en-US" sz="500" kern="1200" dirty="0">
-                <a:solidFill>
-                  <a:schemeClr val="tx1"/>
-                </a:solidFill>
-                <a:effectLst/>
-                <a:latin typeface="+mn-lt"/>
-                <a:ea typeface="+mn-ea"/>
-                <a:cs typeface="+mn-cs"/>
-              </a:rPr>
-              <a:t> </a:t>
-            </a:r>
-            <a:r>
-              <a:rPr lang="en-US" altLang="ko-KR" sz="500" kern="1200" dirty="0">
-                <a:solidFill>
-                  <a:schemeClr val="tx1"/>
-                </a:solidFill>
-                <a:effectLst/>
-                <a:latin typeface="+mn-lt"/>
-                <a:ea typeface="+mn-ea"/>
-                <a:cs typeface="+mn-cs"/>
-              </a:rPr>
-              <a:t>'</a:t>
-            </a:r>
-            <a:r>
-              <a:rPr lang="ko-KR" altLang="en-US" sz="500" kern="1200" dirty="0" err="1">
-                <a:solidFill>
-                  <a:schemeClr val="tx1"/>
-                </a:solidFill>
-                <a:effectLst/>
-                <a:latin typeface="+mn-lt"/>
-                <a:ea typeface="+mn-ea"/>
-                <a:cs typeface="+mn-cs"/>
-              </a:rPr>
-              <a:t>우리가치</a:t>
-            </a:r>
-            <a:r>
-              <a:rPr lang="en-US" altLang="ko-KR" sz="500" kern="1200" dirty="0">
-                <a:solidFill>
-                  <a:schemeClr val="tx1"/>
-                </a:solidFill>
-                <a:effectLst/>
-                <a:latin typeface="+mn-lt"/>
-                <a:ea typeface="+mn-ea"/>
-                <a:cs typeface="+mn-cs"/>
-              </a:rPr>
-              <a:t>'</a:t>
-            </a:r>
-            <a:r>
-              <a:rPr lang="ko-KR" altLang="en-US" sz="500" kern="1200" dirty="0">
-                <a:solidFill>
-                  <a:schemeClr val="tx1"/>
-                </a:solidFill>
-                <a:effectLst/>
-                <a:latin typeface="+mn-lt"/>
-                <a:ea typeface="+mn-ea"/>
-                <a:cs typeface="+mn-cs"/>
-              </a:rPr>
-              <a:t>인 만큼 여쭤보고 싶습니다</a:t>
-            </a:r>
-            <a:r>
-              <a:rPr lang="en-US" altLang="ko-KR" sz="500" kern="1200" dirty="0">
-                <a:solidFill>
-                  <a:schemeClr val="tx1"/>
-                </a:solidFill>
-                <a:effectLst/>
-                <a:latin typeface="+mn-lt"/>
-                <a:ea typeface="+mn-ea"/>
-                <a:cs typeface="+mn-cs"/>
-              </a:rPr>
-              <a:t>. </a:t>
-            </a:r>
-            <a:r>
-              <a:rPr lang="ko-KR" altLang="en-US" sz="500" kern="1200" dirty="0">
-                <a:solidFill>
-                  <a:schemeClr val="tx1"/>
-                </a:solidFill>
-                <a:effectLst/>
-                <a:latin typeface="+mn-lt"/>
-                <a:ea typeface="+mn-ea"/>
-                <a:cs typeface="+mn-cs"/>
-              </a:rPr>
-              <a:t>선생님들이 생각하시기에 **</a:t>
-            </a:r>
-            <a:r>
-              <a:rPr lang="en-US" altLang="ko-KR" sz="500" kern="1200" dirty="0">
-                <a:solidFill>
-                  <a:schemeClr val="tx1"/>
-                </a:solidFill>
-                <a:effectLst/>
-                <a:latin typeface="+mn-lt"/>
-                <a:ea typeface="+mn-ea"/>
-                <a:cs typeface="+mn-cs"/>
-              </a:rPr>
-              <a:t>'</a:t>
-            </a:r>
-            <a:r>
-              <a:rPr lang="ko-KR" altLang="en-US" sz="500" kern="1200" dirty="0">
-                <a:solidFill>
-                  <a:schemeClr val="tx1"/>
-                </a:solidFill>
-                <a:effectLst/>
-                <a:latin typeface="+mn-lt"/>
-                <a:ea typeface="+mn-ea"/>
-                <a:cs typeface="+mn-cs"/>
-              </a:rPr>
-              <a:t>정말 기분 좋은 협업</a:t>
-            </a:r>
-            <a:r>
-              <a:rPr lang="en-US" altLang="ko-KR" sz="500" kern="1200" dirty="0">
-                <a:solidFill>
-                  <a:schemeClr val="tx1"/>
-                </a:solidFill>
-                <a:effectLst/>
-                <a:latin typeface="+mn-lt"/>
-                <a:ea typeface="+mn-ea"/>
-                <a:cs typeface="+mn-cs"/>
-              </a:rPr>
-              <a:t>'**</a:t>
-            </a:r>
-            <a:r>
-              <a:rPr lang="ko-KR" altLang="en-US" sz="500" kern="1200" dirty="0">
-                <a:solidFill>
-                  <a:schemeClr val="tx1"/>
-                </a:solidFill>
-                <a:effectLst/>
-                <a:latin typeface="+mn-lt"/>
-                <a:ea typeface="+mn-ea"/>
-                <a:cs typeface="+mn-cs"/>
-              </a:rPr>
-              <a:t>을 한 문장이나 단어로 표현한다면 무엇일까요</a:t>
-            </a:r>
-            <a:r>
-              <a:rPr lang="en-US" altLang="ko-KR" sz="500" kern="1200" dirty="0">
-                <a:solidFill>
-                  <a:schemeClr val="tx1"/>
-                </a:solidFill>
-                <a:effectLst/>
-                <a:latin typeface="+mn-lt"/>
-                <a:ea typeface="+mn-ea"/>
-                <a:cs typeface="+mn-cs"/>
-              </a:rPr>
-              <a:t>? </a:t>
-            </a:r>
-            <a:endParaRPr lang="ko-KR" altLang="en-US" sz="500" kern="1200" dirty="0">
-              <a:solidFill>
-                <a:schemeClr val="tx1"/>
-              </a:solidFill>
-              <a:effectLst/>
-              <a:latin typeface="+mn-lt"/>
-              <a:ea typeface="+mn-ea"/>
-              <a:cs typeface="+mn-cs"/>
-            </a:endParaRPr>
-          </a:p>
-          <a:p>
-            <a:pPr marL="0" marR="0" lvl="0" indent="0" algn="l" defTabSz="914400" rtl="0" eaLnBrk="1" fontAlgn="auto" latinLnBrk="1" hangingPunct="1">
-              <a:lnSpc>
-                <a:spcPct val="100000"/>
-              </a:lnSpc>
-              <a:spcBef>
-                <a:spcPts val="0"/>
-              </a:spcBef>
-              <a:spcAft>
-                <a:spcPts val="0"/>
-              </a:spcAft>
-              <a:buClrTx/>
-              <a:buSzTx/>
-              <a:buFontTx/>
-              <a:buNone/>
-              <a:tabLst/>
-              <a:defRPr/>
-            </a:pPr>
-            <a:r>
-              <a:rPr lang="en-US" altLang="ko-KR" sz="500" kern="1200" dirty="0">
-                <a:solidFill>
-                  <a:schemeClr val="tx1"/>
-                </a:solidFill>
-                <a:effectLst/>
-                <a:latin typeface="+mn-lt"/>
-                <a:ea typeface="+mn-ea"/>
-                <a:cs typeface="+mn-cs"/>
-              </a:rPr>
-              <a:t>"</a:t>
-            </a:r>
-            <a:r>
-              <a:rPr lang="ko-KR" altLang="en-US" sz="500" kern="1200" dirty="0">
-                <a:solidFill>
-                  <a:schemeClr val="tx1"/>
-                </a:solidFill>
-                <a:effectLst/>
-                <a:latin typeface="+mn-lt"/>
-                <a:ea typeface="+mn-ea"/>
-                <a:cs typeface="+mn-cs"/>
-              </a:rPr>
-              <a:t>최근 일주일 동안 협업하면서 서로에게 가장 많이 했던 말이 무엇인가요</a:t>
-            </a:r>
-            <a:r>
-              <a:rPr lang="en-US" altLang="ko-KR" sz="500" kern="1200" dirty="0">
-                <a:solidFill>
-                  <a:schemeClr val="tx1"/>
-                </a:solidFill>
-                <a:effectLst/>
-                <a:latin typeface="+mn-lt"/>
-                <a:ea typeface="+mn-ea"/>
-                <a:cs typeface="+mn-cs"/>
-              </a:rPr>
-              <a:t>? </a:t>
-            </a:r>
-            <a:r>
-              <a:rPr lang="ko-KR" altLang="en-US" sz="500" kern="1200" dirty="0">
-                <a:solidFill>
-                  <a:schemeClr val="tx1"/>
-                </a:solidFill>
-                <a:effectLst/>
-                <a:latin typeface="+mn-lt"/>
-                <a:ea typeface="+mn-ea"/>
-                <a:cs typeface="+mn-cs"/>
-              </a:rPr>
-              <a:t>혹시 그 말이 서로를 힘들게 하는 말은 아니었는지 오늘 함께 돌아보고자 합니다</a:t>
-            </a:r>
-            <a:r>
-              <a:rPr lang="en-US" altLang="ko-KR" sz="500" kern="1200" dirty="0">
-                <a:solidFill>
-                  <a:schemeClr val="tx1"/>
-                </a:solidFill>
-                <a:effectLst/>
-                <a:latin typeface="+mn-lt"/>
-                <a:ea typeface="+mn-ea"/>
-                <a:cs typeface="+mn-cs"/>
-              </a:rPr>
-              <a:t>.“</a:t>
-            </a:r>
-            <a:endParaRPr lang="ko-KR" altLang="en-US" sz="500" kern="1200" dirty="0">
-              <a:solidFill>
-                <a:schemeClr val="tx1"/>
-              </a:solidFill>
-              <a:effectLst/>
-              <a:latin typeface="+mn-lt"/>
-              <a:ea typeface="+mn-ea"/>
-              <a:cs typeface="+mn-cs"/>
-            </a:endParaRPr>
-          </a:p>
-          <a:p>
             <a:endParaRPr lang="ko-KR" altLang="en-US" sz="600" dirty="0"/>
           </a:p>
         </p:txBody>
@@ -2223,591 +897,6 @@
           <a:bodyPr/>
           <a:lstStyle/>
           <a:p>
-            <a:r>
-              <a:rPr lang="en-US" altLang="ko-KR" sz="800" dirty="0"/>
-              <a:t>"</a:t>
-            </a:r>
-            <a:r>
-              <a:rPr lang="ko-KR" altLang="en-US" sz="800" dirty="0"/>
-              <a:t>우리는 환자의 회복이라는 같은 목표를 가진 든든한 파트너입니다</a:t>
-            </a:r>
-            <a:r>
-              <a:rPr lang="en-US" altLang="ko-KR" sz="800" dirty="0"/>
-              <a:t>. </a:t>
-            </a:r>
-            <a:r>
-              <a:rPr lang="ko-KR" altLang="en-US" sz="800" dirty="0"/>
-              <a:t>하지만 현장의 바쁜 흐름 속에서 소통의 빈틈이 생길 때마다 마음이 </a:t>
-            </a:r>
-            <a:r>
-              <a:rPr lang="ko-KR" altLang="en-US" sz="800" dirty="0" err="1"/>
-              <a:t>무거우셨으리라</a:t>
-            </a:r>
-            <a:r>
-              <a:rPr lang="ko-KR" altLang="en-US" sz="800" dirty="0"/>
-              <a:t> 생각합니다</a:t>
-            </a:r>
-            <a:r>
-              <a:rPr lang="en-US" altLang="ko-KR" sz="800" dirty="0"/>
-              <a:t>. </a:t>
-            </a:r>
-            <a:r>
-              <a:rPr lang="ko-KR" altLang="en-US" sz="800" dirty="0"/>
-              <a:t>오늘 이 자리는</a:t>
-            </a:r>
-            <a:r>
-              <a:rPr lang="en-US" altLang="ko-KR" sz="800" dirty="0"/>
-              <a:t>, </a:t>
-            </a:r>
-            <a:r>
-              <a:rPr lang="ko-KR" altLang="en-US" sz="800" dirty="0"/>
-              <a:t>전문가로서의 자부심을 지키며 일할 수 있는 **‘우리만의 건강한 기준’**을 함께 고민해보기 위해 마련하였습니다</a:t>
-            </a:r>
-            <a:endParaRPr lang="en-US" altLang="ko-KR" sz="800" dirty="0"/>
-          </a:p>
-          <a:p>
-            <a:endParaRPr lang="en-US" altLang="ko-KR" sz="800" dirty="0"/>
-          </a:p>
-          <a:p>
-            <a:r>
-              <a:rPr lang="en-US" altLang="ko-KR" sz="800" dirty="0"/>
-              <a:t>."</a:t>
-            </a:r>
-            <a:r>
-              <a:rPr lang="ko-KR" altLang="en-US" sz="500" kern="1200" dirty="0">
-                <a:solidFill>
-                  <a:schemeClr val="tx1"/>
-                </a:solidFill>
-                <a:effectLst/>
-                <a:latin typeface="+mn-lt"/>
-                <a:ea typeface="+mn-ea"/>
-                <a:cs typeface="+mn-cs"/>
-              </a:rPr>
-              <a:t>본론으로 들어가기 전 가벼운 질문 하나 </a:t>
-            </a:r>
-            <a:r>
-              <a:rPr lang="ko-KR" altLang="en-US" sz="500" kern="1200" dirty="0" err="1">
-                <a:solidFill>
-                  <a:schemeClr val="tx1"/>
-                </a:solidFill>
-                <a:effectLst/>
-                <a:latin typeface="+mn-lt"/>
-                <a:ea typeface="+mn-ea"/>
-                <a:cs typeface="+mn-cs"/>
-              </a:rPr>
-              <a:t>드릴게요</a:t>
-            </a:r>
-            <a:r>
-              <a:rPr lang="en-US" altLang="ko-KR" sz="500" kern="1200" dirty="0">
-                <a:solidFill>
-                  <a:schemeClr val="tx1"/>
-                </a:solidFill>
-                <a:effectLst/>
-                <a:latin typeface="+mn-lt"/>
-                <a:ea typeface="+mn-ea"/>
-                <a:cs typeface="+mn-cs"/>
-              </a:rPr>
-              <a:t>. </a:t>
-            </a:r>
-            <a:r>
-              <a:rPr lang="ko-KR" altLang="en-US" sz="500" kern="1200" dirty="0">
-                <a:solidFill>
-                  <a:schemeClr val="tx1"/>
-                </a:solidFill>
-                <a:effectLst/>
-                <a:latin typeface="+mn-lt"/>
-                <a:ea typeface="+mn-ea"/>
-                <a:cs typeface="+mn-cs"/>
-              </a:rPr>
-              <a:t>오늘 업무하시면서 </a:t>
-            </a:r>
-            <a:r>
-              <a:rPr lang="en-US" altLang="ko-KR" sz="500" kern="1200" dirty="0">
-                <a:solidFill>
-                  <a:schemeClr val="tx1"/>
-                </a:solidFill>
-                <a:effectLst/>
-                <a:latin typeface="+mn-lt"/>
-                <a:ea typeface="+mn-ea"/>
-                <a:cs typeface="+mn-cs"/>
-              </a:rPr>
-              <a:t>PA </a:t>
-            </a:r>
-            <a:r>
-              <a:rPr lang="ko-KR" altLang="en-US" sz="500" kern="1200" dirty="0">
-                <a:solidFill>
-                  <a:schemeClr val="tx1"/>
-                </a:solidFill>
-                <a:effectLst/>
-                <a:latin typeface="+mn-lt"/>
-                <a:ea typeface="+mn-ea"/>
-                <a:cs typeface="+mn-cs"/>
-              </a:rPr>
-              <a:t>선생님 혹은 병동 선생님과 소통할 때</a:t>
-            </a:r>
-            <a:r>
-              <a:rPr lang="en-US" altLang="ko-KR" sz="500" kern="1200" dirty="0">
-                <a:solidFill>
-                  <a:schemeClr val="tx1"/>
-                </a:solidFill>
-                <a:effectLst/>
-                <a:latin typeface="+mn-lt"/>
-                <a:ea typeface="+mn-ea"/>
-                <a:cs typeface="+mn-cs"/>
-              </a:rPr>
-              <a:t>, </a:t>
-            </a:r>
-            <a:r>
-              <a:rPr lang="en-US" altLang="ko-KR" sz="500" b="1" kern="1200" dirty="0">
-                <a:solidFill>
-                  <a:schemeClr val="tx1"/>
-                </a:solidFill>
-                <a:effectLst/>
-                <a:latin typeface="+mn-lt"/>
-                <a:ea typeface="+mn-ea"/>
-                <a:cs typeface="+mn-cs"/>
-              </a:rPr>
-              <a:t>'</a:t>
-            </a:r>
-            <a:r>
-              <a:rPr lang="ko-KR" altLang="en-US" sz="500" b="1" kern="1200" dirty="0">
-                <a:solidFill>
-                  <a:schemeClr val="tx1"/>
-                </a:solidFill>
-                <a:effectLst/>
-                <a:latin typeface="+mn-lt"/>
-                <a:ea typeface="+mn-ea"/>
-                <a:cs typeface="+mn-cs"/>
-              </a:rPr>
-              <a:t>아</a:t>
-            </a:r>
-            <a:r>
-              <a:rPr lang="en-US" altLang="ko-KR" sz="500" b="1" kern="1200" dirty="0">
-                <a:solidFill>
-                  <a:schemeClr val="tx1"/>
-                </a:solidFill>
-                <a:effectLst/>
-                <a:latin typeface="+mn-lt"/>
-                <a:ea typeface="+mn-ea"/>
-                <a:cs typeface="+mn-cs"/>
-              </a:rPr>
-              <a:t>, </a:t>
-            </a:r>
-            <a:r>
-              <a:rPr lang="ko-KR" altLang="en-US" sz="500" b="1" kern="1200" dirty="0">
-                <a:solidFill>
-                  <a:schemeClr val="tx1"/>
-                </a:solidFill>
-                <a:effectLst/>
-                <a:latin typeface="+mn-lt"/>
-                <a:ea typeface="+mn-ea"/>
-                <a:cs typeface="+mn-cs"/>
-              </a:rPr>
-              <a:t>이 말</a:t>
-            </a:r>
-            <a:r>
-              <a:rPr lang="en-US" altLang="ko-KR" sz="500" b="1" kern="1200" dirty="0">
-                <a:solidFill>
-                  <a:schemeClr val="tx1"/>
-                </a:solidFill>
-                <a:effectLst/>
-                <a:latin typeface="+mn-lt"/>
-                <a:ea typeface="+mn-ea"/>
-                <a:cs typeface="+mn-cs"/>
-              </a:rPr>
-              <a:t>(</a:t>
-            </a:r>
-            <a:r>
-              <a:rPr lang="ko-KR" altLang="en-US" sz="500" b="1" kern="1200" dirty="0">
-                <a:solidFill>
-                  <a:schemeClr val="tx1"/>
-                </a:solidFill>
-                <a:effectLst/>
-                <a:latin typeface="+mn-lt"/>
-                <a:ea typeface="+mn-ea"/>
-                <a:cs typeface="+mn-cs"/>
-              </a:rPr>
-              <a:t>혹은 이 행동</a:t>
-            </a:r>
-            <a:r>
-              <a:rPr lang="en-US" altLang="ko-KR" sz="500" b="1" kern="1200" dirty="0">
-                <a:solidFill>
-                  <a:schemeClr val="tx1"/>
-                </a:solidFill>
-                <a:effectLst/>
-                <a:latin typeface="+mn-lt"/>
-                <a:ea typeface="+mn-ea"/>
-                <a:cs typeface="+mn-cs"/>
-              </a:rPr>
-              <a:t>) </a:t>
-            </a:r>
-            <a:r>
-              <a:rPr lang="ko-KR" altLang="en-US" sz="500" b="1" kern="1200" dirty="0">
-                <a:solidFill>
-                  <a:schemeClr val="tx1"/>
-                </a:solidFill>
-                <a:effectLst/>
-                <a:latin typeface="+mn-lt"/>
-                <a:ea typeface="+mn-ea"/>
-                <a:cs typeface="+mn-cs"/>
-              </a:rPr>
-              <a:t>덕분에 한결 수월했다</a:t>
-            </a:r>
-            <a:r>
-              <a:rPr lang="en-US" altLang="ko-KR" sz="500" b="1" kern="1200" dirty="0">
-                <a:solidFill>
-                  <a:schemeClr val="tx1"/>
-                </a:solidFill>
-                <a:effectLst/>
-                <a:latin typeface="+mn-lt"/>
-                <a:ea typeface="+mn-ea"/>
-                <a:cs typeface="+mn-cs"/>
-              </a:rPr>
-              <a:t>!'</a:t>
-            </a:r>
-            <a:r>
-              <a:rPr lang="ko-KR" altLang="en-US" sz="500" kern="1200" dirty="0">
-                <a:solidFill>
-                  <a:schemeClr val="tx1"/>
-                </a:solidFill>
-                <a:effectLst/>
-                <a:latin typeface="+mn-lt"/>
-                <a:ea typeface="+mn-ea"/>
-                <a:cs typeface="+mn-cs"/>
-              </a:rPr>
-              <a:t>싶었던 순간이 </a:t>
-            </a:r>
-            <a:r>
-              <a:rPr lang="en-US" altLang="ko-KR" sz="500" kern="1200" dirty="0">
-                <a:solidFill>
-                  <a:schemeClr val="tx1"/>
-                </a:solidFill>
-                <a:effectLst/>
-                <a:latin typeface="+mn-lt"/>
-                <a:ea typeface="+mn-ea"/>
-                <a:cs typeface="+mn-cs"/>
-              </a:rPr>
-              <a:t>1</a:t>
-            </a:r>
-            <a:r>
-              <a:rPr lang="ko-KR" altLang="en-US" sz="500" kern="1200" dirty="0">
-                <a:solidFill>
-                  <a:schemeClr val="tx1"/>
-                </a:solidFill>
-                <a:effectLst/>
-                <a:latin typeface="+mn-lt"/>
-                <a:ea typeface="+mn-ea"/>
-                <a:cs typeface="+mn-cs"/>
-              </a:rPr>
-              <a:t>초라도 있으셨나요</a:t>
-            </a:r>
-            <a:r>
-              <a:rPr lang="en-US" altLang="ko-KR" sz="500" kern="1200" dirty="0">
-                <a:solidFill>
-                  <a:schemeClr val="tx1"/>
-                </a:solidFill>
-                <a:effectLst/>
-                <a:latin typeface="+mn-lt"/>
-                <a:ea typeface="+mn-ea"/>
-                <a:cs typeface="+mn-cs"/>
-              </a:rPr>
-              <a:t>?“</a:t>
-            </a:r>
-            <a:endParaRPr lang="ko-KR" altLang="en-US" sz="500" kern="1200" dirty="0">
-              <a:solidFill>
-                <a:schemeClr val="tx1"/>
-              </a:solidFill>
-              <a:effectLst/>
-              <a:latin typeface="+mn-lt"/>
-              <a:ea typeface="+mn-ea"/>
-              <a:cs typeface="+mn-cs"/>
-            </a:endParaRPr>
-          </a:p>
-          <a:p>
-            <a:pPr marL="0" marR="0" lvl="0" indent="0" algn="l" defTabSz="914400" rtl="0" eaLnBrk="1" fontAlgn="auto" latinLnBrk="1" hangingPunct="1">
-              <a:lnSpc>
-                <a:spcPct val="100000"/>
-              </a:lnSpc>
-              <a:spcBef>
-                <a:spcPts val="0"/>
-              </a:spcBef>
-              <a:spcAft>
-                <a:spcPts val="0"/>
-              </a:spcAft>
-              <a:buClrTx/>
-              <a:buSzTx/>
-              <a:buFontTx/>
-              <a:buNone/>
-              <a:tabLst/>
-              <a:defRPr/>
-            </a:pPr>
-            <a:r>
-              <a:rPr lang="ko-KR" altLang="en-US" sz="500" kern="1200" dirty="0">
-                <a:solidFill>
-                  <a:schemeClr val="tx1"/>
-                </a:solidFill>
-                <a:effectLst/>
-                <a:latin typeface="+mn-lt"/>
-                <a:ea typeface="+mn-ea"/>
-                <a:cs typeface="+mn-cs"/>
-              </a:rPr>
-              <a:t>우리 </a:t>
-            </a:r>
-            <a:r>
-              <a:rPr lang="ko-KR" altLang="en-US" sz="500" kern="1200" dirty="0" err="1">
-                <a:solidFill>
-                  <a:schemeClr val="tx1"/>
-                </a:solidFill>
-                <a:effectLst/>
-                <a:latin typeface="+mn-lt"/>
-                <a:ea typeface="+mn-ea"/>
-                <a:cs typeface="+mn-cs"/>
-              </a:rPr>
-              <a:t>팀명이</a:t>
-            </a:r>
-            <a:r>
-              <a:rPr lang="ko-KR" altLang="en-US" sz="500" kern="1200" dirty="0">
-                <a:solidFill>
-                  <a:schemeClr val="tx1"/>
-                </a:solidFill>
-                <a:effectLst/>
-                <a:latin typeface="+mn-lt"/>
-                <a:ea typeface="+mn-ea"/>
-                <a:cs typeface="+mn-cs"/>
-              </a:rPr>
-              <a:t> </a:t>
-            </a:r>
-            <a:r>
-              <a:rPr lang="en-US" altLang="ko-KR" sz="500" kern="1200" dirty="0">
-                <a:solidFill>
-                  <a:schemeClr val="tx1"/>
-                </a:solidFill>
-                <a:effectLst/>
-                <a:latin typeface="+mn-lt"/>
-                <a:ea typeface="+mn-ea"/>
-                <a:cs typeface="+mn-cs"/>
-              </a:rPr>
-              <a:t>'</a:t>
-            </a:r>
-            <a:r>
-              <a:rPr lang="ko-KR" altLang="en-US" sz="500" kern="1200" dirty="0" err="1">
-                <a:solidFill>
-                  <a:schemeClr val="tx1"/>
-                </a:solidFill>
-                <a:effectLst/>
-                <a:latin typeface="+mn-lt"/>
-                <a:ea typeface="+mn-ea"/>
-                <a:cs typeface="+mn-cs"/>
-              </a:rPr>
-              <a:t>우리가치</a:t>
-            </a:r>
-            <a:r>
-              <a:rPr lang="en-US" altLang="ko-KR" sz="500" kern="1200" dirty="0">
-                <a:solidFill>
-                  <a:schemeClr val="tx1"/>
-                </a:solidFill>
-                <a:effectLst/>
-                <a:latin typeface="+mn-lt"/>
-                <a:ea typeface="+mn-ea"/>
-                <a:cs typeface="+mn-cs"/>
-              </a:rPr>
-              <a:t>'</a:t>
-            </a:r>
-            <a:r>
-              <a:rPr lang="ko-KR" altLang="en-US" sz="500" kern="1200" dirty="0">
-                <a:solidFill>
-                  <a:schemeClr val="tx1"/>
-                </a:solidFill>
-                <a:effectLst/>
-                <a:latin typeface="+mn-lt"/>
-                <a:ea typeface="+mn-ea"/>
-                <a:cs typeface="+mn-cs"/>
-              </a:rPr>
-              <a:t>인 만큼 여쭤보고 싶습니다</a:t>
-            </a:r>
-            <a:r>
-              <a:rPr lang="en-US" altLang="ko-KR" sz="500" kern="1200" dirty="0">
-                <a:solidFill>
-                  <a:schemeClr val="tx1"/>
-                </a:solidFill>
-                <a:effectLst/>
-                <a:latin typeface="+mn-lt"/>
-                <a:ea typeface="+mn-ea"/>
-                <a:cs typeface="+mn-cs"/>
-              </a:rPr>
-              <a:t>. </a:t>
-            </a:r>
-            <a:r>
-              <a:rPr lang="ko-KR" altLang="en-US" sz="500" kern="1200" dirty="0">
-                <a:solidFill>
-                  <a:schemeClr val="tx1"/>
-                </a:solidFill>
-                <a:effectLst/>
-                <a:latin typeface="+mn-lt"/>
-                <a:ea typeface="+mn-ea"/>
-                <a:cs typeface="+mn-cs"/>
-              </a:rPr>
-              <a:t>선생님들이 생각하시기에 **</a:t>
-            </a:r>
-            <a:r>
-              <a:rPr lang="en-US" altLang="ko-KR" sz="500" kern="1200" dirty="0">
-                <a:solidFill>
-                  <a:schemeClr val="tx1"/>
-                </a:solidFill>
-                <a:effectLst/>
-                <a:latin typeface="+mn-lt"/>
-                <a:ea typeface="+mn-ea"/>
-                <a:cs typeface="+mn-cs"/>
-              </a:rPr>
-              <a:t>'</a:t>
-            </a:r>
-            <a:r>
-              <a:rPr lang="ko-KR" altLang="en-US" sz="500" kern="1200" dirty="0">
-                <a:solidFill>
-                  <a:schemeClr val="tx1"/>
-                </a:solidFill>
-                <a:effectLst/>
-                <a:latin typeface="+mn-lt"/>
-                <a:ea typeface="+mn-ea"/>
-                <a:cs typeface="+mn-cs"/>
-              </a:rPr>
-              <a:t>정말 기분 좋은 협업</a:t>
-            </a:r>
-            <a:r>
-              <a:rPr lang="en-US" altLang="ko-KR" sz="500" kern="1200" dirty="0">
-                <a:solidFill>
-                  <a:schemeClr val="tx1"/>
-                </a:solidFill>
-                <a:effectLst/>
-                <a:latin typeface="+mn-lt"/>
-                <a:ea typeface="+mn-ea"/>
-                <a:cs typeface="+mn-cs"/>
-              </a:rPr>
-              <a:t>'**</a:t>
-            </a:r>
-            <a:r>
-              <a:rPr lang="ko-KR" altLang="en-US" sz="500" kern="1200" dirty="0">
-                <a:solidFill>
-                  <a:schemeClr val="tx1"/>
-                </a:solidFill>
-                <a:effectLst/>
-                <a:latin typeface="+mn-lt"/>
-                <a:ea typeface="+mn-ea"/>
-                <a:cs typeface="+mn-cs"/>
-              </a:rPr>
-              <a:t>을 한 문장이나 단어로 표현한다면 무엇일까요</a:t>
-            </a:r>
-            <a:r>
-              <a:rPr lang="en-US" altLang="ko-KR" sz="500" kern="1200" dirty="0">
-                <a:solidFill>
-                  <a:schemeClr val="tx1"/>
-                </a:solidFill>
-                <a:effectLst/>
-                <a:latin typeface="+mn-lt"/>
-                <a:ea typeface="+mn-ea"/>
-                <a:cs typeface="+mn-cs"/>
-              </a:rPr>
-              <a:t>? </a:t>
-            </a:r>
-            <a:endParaRPr lang="ko-KR" altLang="en-US" sz="500" kern="1200" dirty="0">
-              <a:solidFill>
-                <a:schemeClr val="tx1"/>
-              </a:solidFill>
-              <a:effectLst/>
-              <a:latin typeface="+mn-lt"/>
-              <a:ea typeface="+mn-ea"/>
-              <a:cs typeface="+mn-cs"/>
-            </a:endParaRPr>
-          </a:p>
-          <a:p>
-            <a:pPr marL="0" marR="0" lvl="0" indent="0" algn="l" defTabSz="914400" rtl="0" eaLnBrk="1" fontAlgn="auto" latinLnBrk="1" hangingPunct="1">
-              <a:lnSpc>
-                <a:spcPct val="100000"/>
-              </a:lnSpc>
-              <a:spcBef>
-                <a:spcPts val="0"/>
-              </a:spcBef>
-              <a:spcAft>
-                <a:spcPts val="0"/>
-              </a:spcAft>
-              <a:buClrTx/>
-              <a:buSzTx/>
-              <a:buFontTx/>
-              <a:buNone/>
-              <a:tabLst/>
-              <a:defRPr/>
-            </a:pPr>
-            <a:r>
-              <a:rPr lang="en-US" altLang="ko-KR" sz="500" kern="1200" dirty="0">
-                <a:solidFill>
-                  <a:schemeClr val="tx1"/>
-                </a:solidFill>
-                <a:effectLst/>
-                <a:latin typeface="+mn-lt"/>
-                <a:ea typeface="+mn-ea"/>
-                <a:cs typeface="+mn-cs"/>
-              </a:rPr>
-              <a:t>"</a:t>
-            </a:r>
-            <a:r>
-              <a:rPr lang="ko-KR" altLang="en-US" sz="500" kern="1200" dirty="0">
-                <a:solidFill>
-                  <a:schemeClr val="tx1"/>
-                </a:solidFill>
-                <a:effectLst/>
-                <a:latin typeface="+mn-lt"/>
-                <a:ea typeface="+mn-ea"/>
-                <a:cs typeface="+mn-cs"/>
-              </a:rPr>
-              <a:t>최근 일주일 동안 협업하면서 서로에게 가장 많이 했던 말이 무엇인가요</a:t>
-            </a:r>
-            <a:r>
-              <a:rPr lang="en-US" altLang="ko-KR" sz="500" kern="1200" dirty="0">
-                <a:solidFill>
-                  <a:schemeClr val="tx1"/>
-                </a:solidFill>
-                <a:effectLst/>
-                <a:latin typeface="+mn-lt"/>
-                <a:ea typeface="+mn-ea"/>
-                <a:cs typeface="+mn-cs"/>
-              </a:rPr>
-              <a:t>? </a:t>
-            </a:r>
-            <a:r>
-              <a:rPr lang="ko-KR" altLang="en-US" sz="500" kern="1200" dirty="0">
-                <a:solidFill>
-                  <a:schemeClr val="tx1"/>
-                </a:solidFill>
-                <a:effectLst/>
-                <a:latin typeface="+mn-lt"/>
-                <a:ea typeface="+mn-ea"/>
-                <a:cs typeface="+mn-cs"/>
-              </a:rPr>
-              <a:t>혹시 그 말이 서로를 힘들게 하는 말은 아니었는지 오늘 함께 돌아보고자 합니다</a:t>
-            </a:r>
-            <a:r>
-              <a:rPr lang="en-US" altLang="ko-KR" sz="500" kern="1200" dirty="0">
-                <a:solidFill>
-                  <a:schemeClr val="tx1"/>
-                </a:solidFill>
-                <a:effectLst/>
-                <a:latin typeface="+mn-lt"/>
-                <a:ea typeface="+mn-ea"/>
-                <a:cs typeface="+mn-cs"/>
-              </a:rPr>
-              <a:t>.“</a:t>
-            </a:r>
-            <a:endParaRPr lang="ko-KR" altLang="en-US" sz="500" kern="1200" dirty="0">
-              <a:solidFill>
-                <a:schemeClr val="tx1"/>
-              </a:solidFill>
-              <a:effectLst/>
-              <a:latin typeface="+mn-lt"/>
-              <a:ea typeface="+mn-ea"/>
-              <a:cs typeface="+mn-cs"/>
-            </a:endParaRPr>
-          </a:p>
-          <a:p>
             <a:endParaRPr lang="ko-KR" altLang="en-US" sz="600" dirty="0"/>
           </a:p>
         </p:txBody>
@@ -2838,7 +927,7 @@
     </p:spTree>
     <p:extLst>
       <p:ext uri="{BB962C8B-B14F-4D97-AF65-F5344CB8AC3E}">
-        <p14:creationId xmlns:p14="http://schemas.microsoft.com/office/powerpoint/2010/main" val="3918340588"/>
+        <p14:creationId xmlns:p14="http://schemas.microsoft.com/office/powerpoint/2010/main" val="3645040229"/>
       </p:ext>
     </p:extLst>
   </p:cSld>
@@ -2892,591 +981,6 @@
           <a:bodyPr/>
           <a:lstStyle/>
           <a:p>
-            <a:r>
-              <a:rPr lang="en-US" altLang="ko-KR" sz="800" dirty="0"/>
-              <a:t>"</a:t>
-            </a:r>
-            <a:r>
-              <a:rPr lang="ko-KR" altLang="en-US" sz="800" dirty="0"/>
-              <a:t>우리는 환자의 회복이라는 같은 목표를 가진 든든한 파트너입니다</a:t>
-            </a:r>
-            <a:r>
-              <a:rPr lang="en-US" altLang="ko-KR" sz="800" dirty="0"/>
-              <a:t>. </a:t>
-            </a:r>
-            <a:r>
-              <a:rPr lang="ko-KR" altLang="en-US" sz="800" dirty="0"/>
-              <a:t>하지만 현장의 바쁜 흐름 속에서 소통의 빈틈이 생길 때마다 마음이 </a:t>
-            </a:r>
-            <a:r>
-              <a:rPr lang="ko-KR" altLang="en-US" sz="800" dirty="0" err="1"/>
-              <a:t>무거우셨으리라</a:t>
-            </a:r>
-            <a:r>
-              <a:rPr lang="ko-KR" altLang="en-US" sz="800" dirty="0"/>
-              <a:t> 생각합니다</a:t>
-            </a:r>
-            <a:r>
-              <a:rPr lang="en-US" altLang="ko-KR" sz="800" dirty="0"/>
-              <a:t>. </a:t>
-            </a:r>
-            <a:r>
-              <a:rPr lang="ko-KR" altLang="en-US" sz="800" dirty="0"/>
-              <a:t>오늘 이 자리는</a:t>
-            </a:r>
-            <a:r>
-              <a:rPr lang="en-US" altLang="ko-KR" sz="800" dirty="0"/>
-              <a:t>, </a:t>
-            </a:r>
-            <a:r>
-              <a:rPr lang="ko-KR" altLang="en-US" sz="800" dirty="0"/>
-              <a:t>전문가로서의 자부심을 지키며 일할 수 있는 **‘우리만의 건강한 기준’**을 함께 고민해보기 위해 마련하였습니다</a:t>
-            </a:r>
-            <a:endParaRPr lang="en-US" altLang="ko-KR" sz="800" dirty="0"/>
-          </a:p>
-          <a:p>
-            <a:endParaRPr lang="en-US" altLang="ko-KR" sz="800" dirty="0"/>
-          </a:p>
-          <a:p>
-            <a:r>
-              <a:rPr lang="en-US" altLang="ko-KR" sz="800" dirty="0"/>
-              <a:t>."</a:t>
-            </a:r>
-            <a:r>
-              <a:rPr lang="ko-KR" altLang="en-US" sz="500" kern="1200" dirty="0">
-                <a:solidFill>
-                  <a:schemeClr val="tx1"/>
-                </a:solidFill>
-                <a:effectLst/>
-                <a:latin typeface="+mn-lt"/>
-                <a:ea typeface="+mn-ea"/>
-                <a:cs typeface="+mn-cs"/>
-              </a:rPr>
-              <a:t>본론으로 들어가기 전 가벼운 질문 하나 </a:t>
-            </a:r>
-            <a:r>
-              <a:rPr lang="ko-KR" altLang="en-US" sz="500" kern="1200" dirty="0" err="1">
-                <a:solidFill>
-                  <a:schemeClr val="tx1"/>
-                </a:solidFill>
-                <a:effectLst/>
-                <a:latin typeface="+mn-lt"/>
-                <a:ea typeface="+mn-ea"/>
-                <a:cs typeface="+mn-cs"/>
-              </a:rPr>
-              <a:t>드릴게요</a:t>
-            </a:r>
-            <a:r>
-              <a:rPr lang="en-US" altLang="ko-KR" sz="500" kern="1200" dirty="0">
-                <a:solidFill>
-                  <a:schemeClr val="tx1"/>
-                </a:solidFill>
-                <a:effectLst/>
-                <a:latin typeface="+mn-lt"/>
-                <a:ea typeface="+mn-ea"/>
-                <a:cs typeface="+mn-cs"/>
-              </a:rPr>
-              <a:t>. </a:t>
-            </a:r>
-            <a:r>
-              <a:rPr lang="ko-KR" altLang="en-US" sz="500" kern="1200" dirty="0">
-                <a:solidFill>
-                  <a:schemeClr val="tx1"/>
-                </a:solidFill>
-                <a:effectLst/>
-                <a:latin typeface="+mn-lt"/>
-                <a:ea typeface="+mn-ea"/>
-                <a:cs typeface="+mn-cs"/>
-              </a:rPr>
-              <a:t>오늘 업무하시면서 </a:t>
-            </a:r>
-            <a:r>
-              <a:rPr lang="en-US" altLang="ko-KR" sz="500" kern="1200" dirty="0">
-                <a:solidFill>
-                  <a:schemeClr val="tx1"/>
-                </a:solidFill>
-                <a:effectLst/>
-                <a:latin typeface="+mn-lt"/>
-                <a:ea typeface="+mn-ea"/>
-                <a:cs typeface="+mn-cs"/>
-              </a:rPr>
-              <a:t>PA </a:t>
-            </a:r>
-            <a:r>
-              <a:rPr lang="ko-KR" altLang="en-US" sz="500" kern="1200" dirty="0">
-                <a:solidFill>
-                  <a:schemeClr val="tx1"/>
-                </a:solidFill>
-                <a:effectLst/>
-                <a:latin typeface="+mn-lt"/>
-                <a:ea typeface="+mn-ea"/>
-                <a:cs typeface="+mn-cs"/>
-              </a:rPr>
-              <a:t>선생님 혹은 병동 선생님과 소통할 때</a:t>
-            </a:r>
-            <a:r>
-              <a:rPr lang="en-US" altLang="ko-KR" sz="500" kern="1200" dirty="0">
-                <a:solidFill>
-                  <a:schemeClr val="tx1"/>
-                </a:solidFill>
-                <a:effectLst/>
-                <a:latin typeface="+mn-lt"/>
-                <a:ea typeface="+mn-ea"/>
-                <a:cs typeface="+mn-cs"/>
-              </a:rPr>
-              <a:t>, </a:t>
-            </a:r>
-            <a:r>
-              <a:rPr lang="en-US" altLang="ko-KR" sz="500" b="1" kern="1200" dirty="0">
-                <a:solidFill>
-                  <a:schemeClr val="tx1"/>
-                </a:solidFill>
-                <a:effectLst/>
-                <a:latin typeface="+mn-lt"/>
-                <a:ea typeface="+mn-ea"/>
-                <a:cs typeface="+mn-cs"/>
-              </a:rPr>
-              <a:t>'</a:t>
-            </a:r>
-            <a:r>
-              <a:rPr lang="ko-KR" altLang="en-US" sz="500" b="1" kern="1200" dirty="0">
-                <a:solidFill>
-                  <a:schemeClr val="tx1"/>
-                </a:solidFill>
-                <a:effectLst/>
-                <a:latin typeface="+mn-lt"/>
-                <a:ea typeface="+mn-ea"/>
-                <a:cs typeface="+mn-cs"/>
-              </a:rPr>
-              <a:t>아</a:t>
-            </a:r>
-            <a:r>
-              <a:rPr lang="en-US" altLang="ko-KR" sz="500" b="1" kern="1200" dirty="0">
-                <a:solidFill>
-                  <a:schemeClr val="tx1"/>
-                </a:solidFill>
-                <a:effectLst/>
-                <a:latin typeface="+mn-lt"/>
-                <a:ea typeface="+mn-ea"/>
-                <a:cs typeface="+mn-cs"/>
-              </a:rPr>
-              <a:t>, </a:t>
-            </a:r>
-            <a:r>
-              <a:rPr lang="ko-KR" altLang="en-US" sz="500" b="1" kern="1200" dirty="0">
-                <a:solidFill>
-                  <a:schemeClr val="tx1"/>
-                </a:solidFill>
-                <a:effectLst/>
-                <a:latin typeface="+mn-lt"/>
-                <a:ea typeface="+mn-ea"/>
-                <a:cs typeface="+mn-cs"/>
-              </a:rPr>
-              <a:t>이 말</a:t>
-            </a:r>
-            <a:r>
-              <a:rPr lang="en-US" altLang="ko-KR" sz="500" b="1" kern="1200" dirty="0">
-                <a:solidFill>
-                  <a:schemeClr val="tx1"/>
-                </a:solidFill>
-                <a:effectLst/>
-                <a:latin typeface="+mn-lt"/>
-                <a:ea typeface="+mn-ea"/>
-                <a:cs typeface="+mn-cs"/>
-              </a:rPr>
-              <a:t>(</a:t>
-            </a:r>
-            <a:r>
-              <a:rPr lang="ko-KR" altLang="en-US" sz="500" b="1" kern="1200" dirty="0">
-                <a:solidFill>
-                  <a:schemeClr val="tx1"/>
-                </a:solidFill>
-                <a:effectLst/>
-                <a:latin typeface="+mn-lt"/>
-                <a:ea typeface="+mn-ea"/>
-                <a:cs typeface="+mn-cs"/>
-              </a:rPr>
-              <a:t>혹은 이 행동</a:t>
-            </a:r>
-            <a:r>
-              <a:rPr lang="en-US" altLang="ko-KR" sz="500" b="1" kern="1200" dirty="0">
-                <a:solidFill>
-                  <a:schemeClr val="tx1"/>
-                </a:solidFill>
-                <a:effectLst/>
-                <a:latin typeface="+mn-lt"/>
-                <a:ea typeface="+mn-ea"/>
-                <a:cs typeface="+mn-cs"/>
-              </a:rPr>
-              <a:t>) </a:t>
-            </a:r>
-            <a:r>
-              <a:rPr lang="ko-KR" altLang="en-US" sz="500" b="1" kern="1200" dirty="0">
-                <a:solidFill>
-                  <a:schemeClr val="tx1"/>
-                </a:solidFill>
-                <a:effectLst/>
-                <a:latin typeface="+mn-lt"/>
-                <a:ea typeface="+mn-ea"/>
-                <a:cs typeface="+mn-cs"/>
-              </a:rPr>
-              <a:t>덕분에 한결 수월했다</a:t>
-            </a:r>
-            <a:r>
-              <a:rPr lang="en-US" altLang="ko-KR" sz="500" b="1" kern="1200" dirty="0">
-                <a:solidFill>
-                  <a:schemeClr val="tx1"/>
-                </a:solidFill>
-                <a:effectLst/>
-                <a:latin typeface="+mn-lt"/>
-                <a:ea typeface="+mn-ea"/>
-                <a:cs typeface="+mn-cs"/>
-              </a:rPr>
-              <a:t>!'</a:t>
-            </a:r>
-            <a:r>
-              <a:rPr lang="ko-KR" altLang="en-US" sz="500" kern="1200" dirty="0">
-                <a:solidFill>
-                  <a:schemeClr val="tx1"/>
-                </a:solidFill>
-                <a:effectLst/>
-                <a:latin typeface="+mn-lt"/>
-                <a:ea typeface="+mn-ea"/>
-                <a:cs typeface="+mn-cs"/>
-              </a:rPr>
-              <a:t>싶었던 순간이 </a:t>
-            </a:r>
-            <a:r>
-              <a:rPr lang="en-US" altLang="ko-KR" sz="500" kern="1200" dirty="0">
-                <a:solidFill>
-                  <a:schemeClr val="tx1"/>
-                </a:solidFill>
-                <a:effectLst/>
-                <a:latin typeface="+mn-lt"/>
-                <a:ea typeface="+mn-ea"/>
-                <a:cs typeface="+mn-cs"/>
-              </a:rPr>
-              <a:t>1</a:t>
-            </a:r>
-            <a:r>
-              <a:rPr lang="ko-KR" altLang="en-US" sz="500" kern="1200" dirty="0">
-                <a:solidFill>
-                  <a:schemeClr val="tx1"/>
-                </a:solidFill>
-                <a:effectLst/>
-                <a:latin typeface="+mn-lt"/>
-                <a:ea typeface="+mn-ea"/>
-                <a:cs typeface="+mn-cs"/>
-              </a:rPr>
-              <a:t>초라도 있으셨나요</a:t>
-            </a:r>
-            <a:r>
-              <a:rPr lang="en-US" altLang="ko-KR" sz="500" kern="1200" dirty="0">
-                <a:solidFill>
-                  <a:schemeClr val="tx1"/>
-                </a:solidFill>
-                <a:effectLst/>
-                <a:latin typeface="+mn-lt"/>
-                <a:ea typeface="+mn-ea"/>
-                <a:cs typeface="+mn-cs"/>
-              </a:rPr>
-              <a:t>?“</a:t>
-            </a:r>
-            <a:endParaRPr lang="ko-KR" altLang="en-US" sz="500" kern="1200" dirty="0">
-              <a:solidFill>
-                <a:schemeClr val="tx1"/>
-              </a:solidFill>
-              <a:effectLst/>
-              <a:latin typeface="+mn-lt"/>
-              <a:ea typeface="+mn-ea"/>
-              <a:cs typeface="+mn-cs"/>
-            </a:endParaRPr>
-          </a:p>
-          <a:p>
-            <a:pPr marL="0" marR="0" lvl="0" indent="0" algn="l" defTabSz="914400" rtl="0" eaLnBrk="1" fontAlgn="auto" latinLnBrk="1" hangingPunct="1">
-              <a:lnSpc>
-                <a:spcPct val="100000"/>
-              </a:lnSpc>
-              <a:spcBef>
-                <a:spcPts val="0"/>
-              </a:spcBef>
-              <a:spcAft>
-                <a:spcPts val="0"/>
-              </a:spcAft>
-              <a:buClrTx/>
-              <a:buSzTx/>
-              <a:buFontTx/>
-              <a:buNone/>
-              <a:tabLst/>
-              <a:defRPr/>
-            </a:pPr>
-            <a:r>
-              <a:rPr lang="ko-KR" altLang="en-US" sz="500" kern="1200" dirty="0">
-                <a:solidFill>
-                  <a:schemeClr val="tx1"/>
-                </a:solidFill>
-                <a:effectLst/>
-                <a:latin typeface="+mn-lt"/>
-                <a:ea typeface="+mn-ea"/>
-                <a:cs typeface="+mn-cs"/>
-              </a:rPr>
-              <a:t>우리 </a:t>
-            </a:r>
-            <a:r>
-              <a:rPr lang="ko-KR" altLang="en-US" sz="500" kern="1200" dirty="0" err="1">
-                <a:solidFill>
-                  <a:schemeClr val="tx1"/>
-                </a:solidFill>
-                <a:effectLst/>
-                <a:latin typeface="+mn-lt"/>
-                <a:ea typeface="+mn-ea"/>
-                <a:cs typeface="+mn-cs"/>
-              </a:rPr>
-              <a:t>팀명이</a:t>
-            </a:r>
-            <a:r>
-              <a:rPr lang="ko-KR" altLang="en-US" sz="500" kern="1200" dirty="0">
-                <a:solidFill>
-                  <a:schemeClr val="tx1"/>
-                </a:solidFill>
-                <a:effectLst/>
-                <a:latin typeface="+mn-lt"/>
-                <a:ea typeface="+mn-ea"/>
-                <a:cs typeface="+mn-cs"/>
-              </a:rPr>
-              <a:t> </a:t>
-            </a:r>
-            <a:r>
-              <a:rPr lang="en-US" altLang="ko-KR" sz="500" kern="1200" dirty="0">
-                <a:solidFill>
-                  <a:schemeClr val="tx1"/>
-                </a:solidFill>
-                <a:effectLst/>
-                <a:latin typeface="+mn-lt"/>
-                <a:ea typeface="+mn-ea"/>
-                <a:cs typeface="+mn-cs"/>
-              </a:rPr>
-              <a:t>'</a:t>
-            </a:r>
-            <a:r>
-              <a:rPr lang="ko-KR" altLang="en-US" sz="500" kern="1200" dirty="0" err="1">
-                <a:solidFill>
-                  <a:schemeClr val="tx1"/>
-                </a:solidFill>
-                <a:effectLst/>
-                <a:latin typeface="+mn-lt"/>
-                <a:ea typeface="+mn-ea"/>
-                <a:cs typeface="+mn-cs"/>
-              </a:rPr>
-              <a:t>우리가치</a:t>
-            </a:r>
-            <a:r>
-              <a:rPr lang="en-US" altLang="ko-KR" sz="500" kern="1200" dirty="0">
-                <a:solidFill>
-                  <a:schemeClr val="tx1"/>
-                </a:solidFill>
-                <a:effectLst/>
-                <a:latin typeface="+mn-lt"/>
-                <a:ea typeface="+mn-ea"/>
-                <a:cs typeface="+mn-cs"/>
-              </a:rPr>
-              <a:t>'</a:t>
-            </a:r>
-            <a:r>
-              <a:rPr lang="ko-KR" altLang="en-US" sz="500" kern="1200" dirty="0">
-                <a:solidFill>
-                  <a:schemeClr val="tx1"/>
-                </a:solidFill>
-                <a:effectLst/>
-                <a:latin typeface="+mn-lt"/>
-                <a:ea typeface="+mn-ea"/>
-                <a:cs typeface="+mn-cs"/>
-              </a:rPr>
-              <a:t>인 만큼 여쭤보고 싶습니다</a:t>
-            </a:r>
-            <a:r>
-              <a:rPr lang="en-US" altLang="ko-KR" sz="500" kern="1200" dirty="0">
-                <a:solidFill>
-                  <a:schemeClr val="tx1"/>
-                </a:solidFill>
-                <a:effectLst/>
-                <a:latin typeface="+mn-lt"/>
-                <a:ea typeface="+mn-ea"/>
-                <a:cs typeface="+mn-cs"/>
-              </a:rPr>
-              <a:t>. </a:t>
-            </a:r>
-            <a:r>
-              <a:rPr lang="ko-KR" altLang="en-US" sz="500" kern="1200" dirty="0">
-                <a:solidFill>
-                  <a:schemeClr val="tx1"/>
-                </a:solidFill>
-                <a:effectLst/>
-                <a:latin typeface="+mn-lt"/>
-                <a:ea typeface="+mn-ea"/>
-                <a:cs typeface="+mn-cs"/>
-              </a:rPr>
-              <a:t>선생님들이 생각하시기에 **</a:t>
-            </a:r>
-            <a:r>
-              <a:rPr lang="en-US" altLang="ko-KR" sz="500" kern="1200" dirty="0">
-                <a:solidFill>
-                  <a:schemeClr val="tx1"/>
-                </a:solidFill>
-                <a:effectLst/>
-                <a:latin typeface="+mn-lt"/>
-                <a:ea typeface="+mn-ea"/>
-                <a:cs typeface="+mn-cs"/>
-              </a:rPr>
-              <a:t>'</a:t>
-            </a:r>
-            <a:r>
-              <a:rPr lang="ko-KR" altLang="en-US" sz="500" kern="1200" dirty="0">
-                <a:solidFill>
-                  <a:schemeClr val="tx1"/>
-                </a:solidFill>
-                <a:effectLst/>
-                <a:latin typeface="+mn-lt"/>
-                <a:ea typeface="+mn-ea"/>
-                <a:cs typeface="+mn-cs"/>
-              </a:rPr>
-              <a:t>정말 기분 좋은 협업</a:t>
-            </a:r>
-            <a:r>
-              <a:rPr lang="en-US" altLang="ko-KR" sz="500" kern="1200" dirty="0">
-                <a:solidFill>
-                  <a:schemeClr val="tx1"/>
-                </a:solidFill>
-                <a:effectLst/>
-                <a:latin typeface="+mn-lt"/>
-                <a:ea typeface="+mn-ea"/>
-                <a:cs typeface="+mn-cs"/>
-              </a:rPr>
-              <a:t>'**</a:t>
-            </a:r>
-            <a:r>
-              <a:rPr lang="ko-KR" altLang="en-US" sz="500" kern="1200" dirty="0">
-                <a:solidFill>
-                  <a:schemeClr val="tx1"/>
-                </a:solidFill>
-                <a:effectLst/>
-                <a:latin typeface="+mn-lt"/>
-                <a:ea typeface="+mn-ea"/>
-                <a:cs typeface="+mn-cs"/>
-              </a:rPr>
-              <a:t>을 한 문장이나 단어로 표현한다면 무엇일까요</a:t>
-            </a:r>
-            <a:r>
-              <a:rPr lang="en-US" altLang="ko-KR" sz="500" kern="1200" dirty="0">
-                <a:solidFill>
-                  <a:schemeClr val="tx1"/>
-                </a:solidFill>
-                <a:effectLst/>
-                <a:latin typeface="+mn-lt"/>
-                <a:ea typeface="+mn-ea"/>
-                <a:cs typeface="+mn-cs"/>
-              </a:rPr>
-              <a:t>? </a:t>
-            </a:r>
-            <a:endParaRPr lang="ko-KR" altLang="en-US" sz="500" kern="1200" dirty="0">
-              <a:solidFill>
-                <a:schemeClr val="tx1"/>
-              </a:solidFill>
-              <a:effectLst/>
-              <a:latin typeface="+mn-lt"/>
-              <a:ea typeface="+mn-ea"/>
-              <a:cs typeface="+mn-cs"/>
-            </a:endParaRPr>
-          </a:p>
-          <a:p>
-            <a:pPr marL="0" marR="0" lvl="0" indent="0" algn="l" defTabSz="914400" rtl="0" eaLnBrk="1" fontAlgn="auto" latinLnBrk="1" hangingPunct="1">
-              <a:lnSpc>
-                <a:spcPct val="100000"/>
-              </a:lnSpc>
-              <a:spcBef>
-                <a:spcPts val="0"/>
-              </a:spcBef>
-              <a:spcAft>
-                <a:spcPts val="0"/>
-              </a:spcAft>
-              <a:buClrTx/>
-              <a:buSzTx/>
-              <a:buFontTx/>
-              <a:buNone/>
-              <a:tabLst/>
-              <a:defRPr/>
-            </a:pPr>
-            <a:r>
-              <a:rPr lang="en-US" altLang="ko-KR" sz="500" kern="1200" dirty="0">
-                <a:solidFill>
-                  <a:schemeClr val="tx1"/>
-                </a:solidFill>
-                <a:effectLst/>
-                <a:latin typeface="+mn-lt"/>
-                <a:ea typeface="+mn-ea"/>
-                <a:cs typeface="+mn-cs"/>
-              </a:rPr>
-              <a:t>"</a:t>
-            </a:r>
-            <a:r>
-              <a:rPr lang="ko-KR" altLang="en-US" sz="500" kern="1200" dirty="0">
-                <a:solidFill>
-                  <a:schemeClr val="tx1"/>
-                </a:solidFill>
-                <a:effectLst/>
-                <a:latin typeface="+mn-lt"/>
-                <a:ea typeface="+mn-ea"/>
-                <a:cs typeface="+mn-cs"/>
-              </a:rPr>
-              <a:t>최근 일주일 동안 협업하면서 서로에게 가장 많이 했던 말이 무엇인가요</a:t>
-            </a:r>
-            <a:r>
-              <a:rPr lang="en-US" altLang="ko-KR" sz="500" kern="1200" dirty="0">
-                <a:solidFill>
-                  <a:schemeClr val="tx1"/>
-                </a:solidFill>
-                <a:effectLst/>
-                <a:latin typeface="+mn-lt"/>
-                <a:ea typeface="+mn-ea"/>
-                <a:cs typeface="+mn-cs"/>
-              </a:rPr>
-              <a:t>? </a:t>
-            </a:r>
-            <a:r>
-              <a:rPr lang="ko-KR" altLang="en-US" sz="500" kern="1200" dirty="0">
-                <a:solidFill>
-                  <a:schemeClr val="tx1"/>
-                </a:solidFill>
-                <a:effectLst/>
-                <a:latin typeface="+mn-lt"/>
-                <a:ea typeface="+mn-ea"/>
-                <a:cs typeface="+mn-cs"/>
-              </a:rPr>
-              <a:t>혹시 그 말이 서로를 힘들게 하는 말은 아니었는지 오늘 함께 돌아보고자 합니다</a:t>
-            </a:r>
-            <a:r>
-              <a:rPr lang="en-US" altLang="ko-KR" sz="500" kern="1200" dirty="0">
-                <a:solidFill>
-                  <a:schemeClr val="tx1"/>
-                </a:solidFill>
-                <a:effectLst/>
-                <a:latin typeface="+mn-lt"/>
-                <a:ea typeface="+mn-ea"/>
-                <a:cs typeface="+mn-cs"/>
-              </a:rPr>
-              <a:t>.“</a:t>
-            </a:r>
-            <a:endParaRPr lang="ko-KR" altLang="en-US" sz="500" kern="1200" dirty="0">
-              <a:solidFill>
-                <a:schemeClr val="tx1"/>
-              </a:solidFill>
-              <a:effectLst/>
-              <a:latin typeface="+mn-lt"/>
-              <a:ea typeface="+mn-ea"/>
-              <a:cs typeface="+mn-cs"/>
-            </a:endParaRPr>
-          </a:p>
-          <a:p>
             <a:endParaRPr lang="ko-KR" altLang="en-US" sz="600" dirty="0"/>
           </a:p>
         </p:txBody>
@@ -3507,7 +1011,7 @@
     </p:spTree>
     <p:extLst>
       <p:ext uri="{BB962C8B-B14F-4D97-AF65-F5344CB8AC3E}">
-        <p14:creationId xmlns:p14="http://schemas.microsoft.com/office/powerpoint/2010/main" val="3645040229"/>
+        <p14:creationId xmlns:p14="http://schemas.microsoft.com/office/powerpoint/2010/main" val="2978557951"/>
       </p:ext>
     </p:extLst>
   </p:cSld>
@@ -3561,591 +1065,6 @@
           <a:bodyPr/>
           <a:lstStyle/>
           <a:p>
-            <a:r>
-              <a:rPr lang="en-US" altLang="ko-KR" sz="800" dirty="0"/>
-              <a:t>"</a:t>
-            </a:r>
-            <a:r>
-              <a:rPr lang="ko-KR" altLang="en-US" sz="800" dirty="0"/>
-              <a:t>우리는 환자의 회복이라는 같은 목표를 가진 든든한 파트너입니다</a:t>
-            </a:r>
-            <a:r>
-              <a:rPr lang="en-US" altLang="ko-KR" sz="800" dirty="0"/>
-              <a:t>. </a:t>
-            </a:r>
-            <a:r>
-              <a:rPr lang="ko-KR" altLang="en-US" sz="800" dirty="0"/>
-              <a:t>하지만 현장의 바쁜 흐름 속에서 소통의 빈틈이 생길 때마다 마음이 </a:t>
-            </a:r>
-            <a:r>
-              <a:rPr lang="ko-KR" altLang="en-US" sz="800" dirty="0" err="1"/>
-              <a:t>무거우셨으리라</a:t>
-            </a:r>
-            <a:r>
-              <a:rPr lang="ko-KR" altLang="en-US" sz="800" dirty="0"/>
-              <a:t> 생각합니다</a:t>
-            </a:r>
-            <a:r>
-              <a:rPr lang="en-US" altLang="ko-KR" sz="800" dirty="0"/>
-              <a:t>. </a:t>
-            </a:r>
-            <a:r>
-              <a:rPr lang="ko-KR" altLang="en-US" sz="800" dirty="0"/>
-              <a:t>오늘 이 자리는</a:t>
-            </a:r>
-            <a:r>
-              <a:rPr lang="en-US" altLang="ko-KR" sz="800" dirty="0"/>
-              <a:t>, </a:t>
-            </a:r>
-            <a:r>
-              <a:rPr lang="ko-KR" altLang="en-US" sz="800" dirty="0"/>
-              <a:t>전문가로서의 자부심을 지키며 일할 수 있는 **‘우리만의 건강한 기준’**을 함께 고민해보기 위해 마련하였습니다</a:t>
-            </a:r>
-            <a:endParaRPr lang="en-US" altLang="ko-KR" sz="800" dirty="0"/>
-          </a:p>
-          <a:p>
-            <a:endParaRPr lang="en-US" altLang="ko-KR" sz="800" dirty="0"/>
-          </a:p>
-          <a:p>
-            <a:r>
-              <a:rPr lang="en-US" altLang="ko-KR" sz="800" dirty="0"/>
-              <a:t>."</a:t>
-            </a:r>
-            <a:r>
-              <a:rPr lang="ko-KR" altLang="en-US" sz="500" kern="1200" dirty="0">
-                <a:solidFill>
-                  <a:schemeClr val="tx1"/>
-                </a:solidFill>
-                <a:effectLst/>
-                <a:latin typeface="+mn-lt"/>
-                <a:ea typeface="+mn-ea"/>
-                <a:cs typeface="+mn-cs"/>
-              </a:rPr>
-              <a:t>본론으로 들어가기 전 가벼운 질문 하나 </a:t>
-            </a:r>
-            <a:r>
-              <a:rPr lang="ko-KR" altLang="en-US" sz="500" kern="1200" dirty="0" err="1">
-                <a:solidFill>
-                  <a:schemeClr val="tx1"/>
-                </a:solidFill>
-                <a:effectLst/>
-                <a:latin typeface="+mn-lt"/>
-                <a:ea typeface="+mn-ea"/>
-                <a:cs typeface="+mn-cs"/>
-              </a:rPr>
-              <a:t>드릴게요</a:t>
-            </a:r>
-            <a:r>
-              <a:rPr lang="en-US" altLang="ko-KR" sz="500" kern="1200" dirty="0">
-                <a:solidFill>
-                  <a:schemeClr val="tx1"/>
-                </a:solidFill>
-                <a:effectLst/>
-                <a:latin typeface="+mn-lt"/>
-                <a:ea typeface="+mn-ea"/>
-                <a:cs typeface="+mn-cs"/>
-              </a:rPr>
-              <a:t>. </a:t>
-            </a:r>
-            <a:r>
-              <a:rPr lang="ko-KR" altLang="en-US" sz="500" kern="1200" dirty="0">
-                <a:solidFill>
-                  <a:schemeClr val="tx1"/>
-                </a:solidFill>
-                <a:effectLst/>
-                <a:latin typeface="+mn-lt"/>
-                <a:ea typeface="+mn-ea"/>
-                <a:cs typeface="+mn-cs"/>
-              </a:rPr>
-              <a:t>오늘 업무하시면서 </a:t>
-            </a:r>
-            <a:r>
-              <a:rPr lang="en-US" altLang="ko-KR" sz="500" kern="1200" dirty="0">
-                <a:solidFill>
-                  <a:schemeClr val="tx1"/>
-                </a:solidFill>
-                <a:effectLst/>
-                <a:latin typeface="+mn-lt"/>
-                <a:ea typeface="+mn-ea"/>
-                <a:cs typeface="+mn-cs"/>
-              </a:rPr>
-              <a:t>PA </a:t>
-            </a:r>
-            <a:r>
-              <a:rPr lang="ko-KR" altLang="en-US" sz="500" kern="1200" dirty="0">
-                <a:solidFill>
-                  <a:schemeClr val="tx1"/>
-                </a:solidFill>
-                <a:effectLst/>
-                <a:latin typeface="+mn-lt"/>
-                <a:ea typeface="+mn-ea"/>
-                <a:cs typeface="+mn-cs"/>
-              </a:rPr>
-              <a:t>선생님 혹은 병동 선생님과 소통할 때</a:t>
-            </a:r>
-            <a:r>
-              <a:rPr lang="en-US" altLang="ko-KR" sz="500" kern="1200" dirty="0">
-                <a:solidFill>
-                  <a:schemeClr val="tx1"/>
-                </a:solidFill>
-                <a:effectLst/>
-                <a:latin typeface="+mn-lt"/>
-                <a:ea typeface="+mn-ea"/>
-                <a:cs typeface="+mn-cs"/>
-              </a:rPr>
-              <a:t>, </a:t>
-            </a:r>
-            <a:r>
-              <a:rPr lang="en-US" altLang="ko-KR" sz="500" b="1" kern="1200" dirty="0">
-                <a:solidFill>
-                  <a:schemeClr val="tx1"/>
-                </a:solidFill>
-                <a:effectLst/>
-                <a:latin typeface="+mn-lt"/>
-                <a:ea typeface="+mn-ea"/>
-                <a:cs typeface="+mn-cs"/>
-              </a:rPr>
-              <a:t>'</a:t>
-            </a:r>
-            <a:r>
-              <a:rPr lang="ko-KR" altLang="en-US" sz="500" b="1" kern="1200" dirty="0">
-                <a:solidFill>
-                  <a:schemeClr val="tx1"/>
-                </a:solidFill>
-                <a:effectLst/>
-                <a:latin typeface="+mn-lt"/>
-                <a:ea typeface="+mn-ea"/>
-                <a:cs typeface="+mn-cs"/>
-              </a:rPr>
-              <a:t>아</a:t>
-            </a:r>
-            <a:r>
-              <a:rPr lang="en-US" altLang="ko-KR" sz="500" b="1" kern="1200" dirty="0">
-                <a:solidFill>
-                  <a:schemeClr val="tx1"/>
-                </a:solidFill>
-                <a:effectLst/>
-                <a:latin typeface="+mn-lt"/>
-                <a:ea typeface="+mn-ea"/>
-                <a:cs typeface="+mn-cs"/>
-              </a:rPr>
-              <a:t>, </a:t>
-            </a:r>
-            <a:r>
-              <a:rPr lang="ko-KR" altLang="en-US" sz="500" b="1" kern="1200" dirty="0">
-                <a:solidFill>
-                  <a:schemeClr val="tx1"/>
-                </a:solidFill>
-                <a:effectLst/>
-                <a:latin typeface="+mn-lt"/>
-                <a:ea typeface="+mn-ea"/>
-                <a:cs typeface="+mn-cs"/>
-              </a:rPr>
-              <a:t>이 말</a:t>
-            </a:r>
-            <a:r>
-              <a:rPr lang="en-US" altLang="ko-KR" sz="500" b="1" kern="1200" dirty="0">
-                <a:solidFill>
-                  <a:schemeClr val="tx1"/>
-                </a:solidFill>
-                <a:effectLst/>
-                <a:latin typeface="+mn-lt"/>
-                <a:ea typeface="+mn-ea"/>
-                <a:cs typeface="+mn-cs"/>
-              </a:rPr>
-              <a:t>(</a:t>
-            </a:r>
-            <a:r>
-              <a:rPr lang="ko-KR" altLang="en-US" sz="500" b="1" kern="1200" dirty="0">
-                <a:solidFill>
-                  <a:schemeClr val="tx1"/>
-                </a:solidFill>
-                <a:effectLst/>
-                <a:latin typeface="+mn-lt"/>
-                <a:ea typeface="+mn-ea"/>
-                <a:cs typeface="+mn-cs"/>
-              </a:rPr>
-              <a:t>혹은 이 행동</a:t>
-            </a:r>
-            <a:r>
-              <a:rPr lang="en-US" altLang="ko-KR" sz="500" b="1" kern="1200" dirty="0">
-                <a:solidFill>
-                  <a:schemeClr val="tx1"/>
-                </a:solidFill>
-                <a:effectLst/>
-                <a:latin typeface="+mn-lt"/>
-                <a:ea typeface="+mn-ea"/>
-                <a:cs typeface="+mn-cs"/>
-              </a:rPr>
-              <a:t>) </a:t>
-            </a:r>
-            <a:r>
-              <a:rPr lang="ko-KR" altLang="en-US" sz="500" b="1" kern="1200" dirty="0">
-                <a:solidFill>
-                  <a:schemeClr val="tx1"/>
-                </a:solidFill>
-                <a:effectLst/>
-                <a:latin typeface="+mn-lt"/>
-                <a:ea typeface="+mn-ea"/>
-                <a:cs typeface="+mn-cs"/>
-              </a:rPr>
-              <a:t>덕분에 한결 수월했다</a:t>
-            </a:r>
-            <a:r>
-              <a:rPr lang="en-US" altLang="ko-KR" sz="500" b="1" kern="1200" dirty="0">
-                <a:solidFill>
-                  <a:schemeClr val="tx1"/>
-                </a:solidFill>
-                <a:effectLst/>
-                <a:latin typeface="+mn-lt"/>
-                <a:ea typeface="+mn-ea"/>
-                <a:cs typeface="+mn-cs"/>
-              </a:rPr>
-              <a:t>!'</a:t>
-            </a:r>
-            <a:r>
-              <a:rPr lang="ko-KR" altLang="en-US" sz="500" kern="1200" dirty="0">
-                <a:solidFill>
-                  <a:schemeClr val="tx1"/>
-                </a:solidFill>
-                <a:effectLst/>
-                <a:latin typeface="+mn-lt"/>
-                <a:ea typeface="+mn-ea"/>
-                <a:cs typeface="+mn-cs"/>
-              </a:rPr>
-              <a:t>싶었던 순간이 </a:t>
-            </a:r>
-            <a:r>
-              <a:rPr lang="en-US" altLang="ko-KR" sz="500" kern="1200" dirty="0">
-                <a:solidFill>
-                  <a:schemeClr val="tx1"/>
-                </a:solidFill>
-                <a:effectLst/>
-                <a:latin typeface="+mn-lt"/>
-                <a:ea typeface="+mn-ea"/>
-                <a:cs typeface="+mn-cs"/>
-              </a:rPr>
-              <a:t>1</a:t>
-            </a:r>
-            <a:r>
-              <a:rPr lang="ko-KR" altLang="en-US" sz="500" kern="1200" dirty="0">
-                <a:solidFill>
-                  <a:schemeClr val="tx1"/>
-                </a:solidFill>
-                <a:effectLst/>
-                <a:latin typeface="+mn-lt"/>
-                <a:ea typeface="+mn-ea"/>
-                <a:cs typeface="+mn-cs"/>
-              </a:rPr>
-              <a:t>초라도 있으셨나요</a:t>
-            </a:r>
-            <a:r>
-              <a:rPr lang="en-US" altLang="ko-KR" sz="500" kern="1200" dirty="0">
-                <a:solidFill>
-                  <a:schemeClr val="tx1"/>
-                </a:solidFill>
-                <a:effectLst/>
-                <a:latin typeface="+mn-lt"/>
-                <a:ea typeface="+mn-ea"/>
-                <a:cs typeface="+mn-cs"/>
-              </a:rPr>
-              <a:t>?“</a:t>
-            </a:r>
-            <a:endParaRPr lang="ko-KR" altLang="en-US" sz="500" kern="1200" dirty="0">
-              <a:solidFill>
-                <a:schemeClr val="tx1"/>
-              </a:solidFill>
-              <a:effectLst/>
-              <a:latin typeface="+mn-lt"/>
-              <a:ea typeface="+mn-ea"/>
-              <a:cs typeface="+mn-cs"/>
-            </a:endParaRPr>
-          </a:p>
-          <a:p>
-            <a:pPr marL="0" marR="0" lvl="0" indent="0" algn="l" defTabSz="914400" rtl="0" eaLnBrk="1" fontAlgn="auto" latinLnBrk="1" hangingPunct="1">
-              <a:lnSpc>
-                <a:spcPct val="100000"/>
-              </a:lnSpc>
-              <a:spcBef>
-                <a:spcPts val="0"/>
-              </a:spcBef>
-              <a:spcAft>
-                <a:spcPts val="0"/>
-              </a:spcAft>
-              <a:buClrTx/>
-              <a:buSzTx/>
-              <a:buFontTx/>
-              <a:buNone/>
-              <a:tabLst/>
-              <a:defRPr/>
-            </a:pPr>
-            <a:r>
-              <a:rPr lang="ko-KR" altLang="en-US" sz="500" kern="1200" dirty="0">
-                <a:solidFill>
-                  <a:schemeClr val="tx1"/>
-                </a:solidFill>
-                <a:effectLst/>
-                <a:latin typeface="+mn-lt"/>
-                <a:ea typeface="+mn-ea"/>
-                <a:cs typeface="+mn-cs"/>
-              </a:rPr>
-              <a:t>우리 </a:t>
-            </a:r>
-            <a:r>
-              <a:rPr lang="ko-KR" altLang="en-US" sz="500" kern="1200" dirty="0" err="1">
-                <a:solidFill>
-                  <a:schemeClr val="tx1"/>
-                </a:solidFill>
-                <a:effectLst/>
-                <a:latin typeface="+mn-lt"/>
-                <a:ea typeface="+mn-ea"/>
-                <a:cs typeface="+mn-cs"/>
-              </a:rPr>
-              <a:t>팀명이</a:t>
-            </a:r>
-            <a:r>
-              <a:rPr lang="ko-KR" altLang="en-US" sz="500" kern="1200" dirty="0">
-                <a:solidFill>
-                  <a:schemeClr val="tx1"/>
-                </a:solidFill>
-                <a:effectLst/>
-                <a:latin typeface="+mn-lt"/>
-                <a:ea typeface="+mn-ea"/>
-                <a:cs typeface="+mn-cs"/>
-              </a:rPr>
-              <a:t> </a:t>
-            </a:r>
-            <a:r>
-              <a:rPr lang="en-US" altLang="ko-KR" sz="500" kern="1200" dirty="0">
-                <a:solidFill>
-                  <a:schemeClr val="tx1"/>
-                </a:solidFill>
-                <a:effectLst/>
-                <a:latin typeface="+mn-lt"/>
-                <a:ea typeface="+mn-ea"/>
-                <a:cs typeface="+mn-cs"/>
-              </a:rPr>
-              <a:t>'</a:t>
-            </a:r>
-            <a:r>
-              <a:rPr lang="ko-KR" altLang="en-US" sz="500" kern="1200" dirty="0" err="1">
-                <a:solidFill>
-                  <a:schemeClr val="tx1"/>
-                </a:solidFill>
-                <a:effectLst/>
-                <a:latin typeface="+mn-lt"/>
-                <a:ea typeface="+mn-ea"/>
-                <a:cs typeface="+mn-cs"/>
-              </a:rPr>
-              <a:t>우리가치</a:t>
-            </a:r>
-            <a:r>
-              <a:rPr lang="en-US" altLang="ko-KR" sz="500" kern="1200" dirty="0">
-                <a:solidFill>
-                  <a:schemeClr val="tx1"/>
-                </a:solidFill>
-                <a:effectLst/>
-                <a:latin typeface="+mn-lt"/>
-                <a:ea typeface="+mn-ea"/>
-                <a:cs typeface="+mn-cs"/>
-              </a:rPr>
-              <a:t>'</a:t>
-            </a:r>
-            <a:r>
-              <a:rPr lang="ko-KR" altLang="en-US" sz="500" kern="1200" dirty="0">
-                <a:solidFill>
-                  <a:schemeClr val="tx1"/>
-                </a:solidFill>
-                <a:effectLst/>
-                <a:latin typeface="+mn-lt"/>
-                <a:ea typeface="+mn-ea"/>
-                <a:cs typeface="+mn-cs"/>
-              </a:rPr>
-              <a:t>인 만큼 여쭤보고 싶습니다</a:t>
-            </a:r>
-            <a:r>
-              <a:rPr lang="en-US" altLang="ko-KR" sz="500" kern="1200" dirty="0">
-                <a:solidFill>
-                  <a:schemeClr val="tx1"/>
-                </a:solidFill>
-                <a:effectLst/>
-                <a:latin typeface="+mn-lt"/>
-                <a:ea typeface="+mn-ea"/>
-                <a:cs typeface="+mn-cs"/>
-              </a:rPr>
-              <a:t>. </a:t>
-            </a:r>
-            <a:r>
-              <a:rPr lang="ko-KR" altLang="en-US" sz="500" kern="1200" dirty="0">
-                <a:solidFill>
-                  <a:schemeClr val="tx1"/>
-                </a:solidFill>
-                <a:effectLst/>
-                <a:latin typeface="+mn-lt"/>
-                <a:ea typeface="+mn-ea"/>
-                <a:cs typeface="+mn-cs"/>
-              </a:rPr>
-              <a:t>선생님들이 생각하시기에 **</a:t>
-            </a:r>
-            <a:r>
-              <a:rPr lang="en-US" altLang="ko-KR" sz="500" kern="1200" dirty="0">
-                <a:solidFill>
-                  <a:schemeClr val="tx1"/>
-                </a:solidFill>
-                <a:effectLst/>
-                <a:latin typeface="+mn-lt"/>
-                <a:ea typeface="+mn-ea"/>
-                <a:cs typeface="+mn-cs"/>
-              </a:rPr>
-              <a:t>'</a:t>
-            </a:r>
-            <a:r>
-              <a:rPr lang="ko-KR" altLang="en-US" sz="500" kern="1200" dirty="0">
-                <a:solidFill>
-                  <a:schemeClr val="tx1"/>
-                </a:solidFill>
-                <a:effectLst/>
-                <a:latin typeface="+mn-lt"/>
-                <a:ea typeface="+mn-ea"/>
-                <a:cs typeface="+mn-cs"/>
-              </a:rPr>
-              <a:t>정말 기분 좋은 협업</a:t>
-            </a:r>
-            <a:r>
-              <a:rPr lang="en-US" altLang="ko-KR" sz="500" kern="1200" dirty="0">
-                <a:solidFill>
-                  <a:schemeClr val="tx1"/>
-                </a:solidFill>
-                <a:effectLst/>
-                <a:latin typeface="+mn-lt"/>
-                <a:ea typeface="+mn-ea"/>
-                <a:cs typeface="+mn-cs"/>
-              </a:rPr>
-              <a:t>'**</a:t>
-            </a:r>
-            <a:r>
-              <a:rPr lang="ko-KR" altLang="en-US" sz="500" kern="1200" dirty="0">
-                <a:solidFill>
-                  <a:schemeClr val="tx1"/>
-                </a:solidFill>
-                <a:effectLst/>
-                <a:latin typeface="+mn-lt"/>
-                <a:ea typeface="+mn-ea"/>
-                <a:cs typeface="+mn-cs"/>
-              </a:rPr>
-              <a:t>을 한 문장이나 단어로 표현한다면 무엇일까요</a:t>
-            </a:r>
-            <a:r>
-              <a:rPr lang="en-US" altLang="ko-KR" sz="500" kern="1200" dirty="0">
-                <a:solidFill>
-                  <a:schemeClr val="tx1"/>
-                </a:solidFill>
-                <a:effectLst/>
-                <a:latin typeface="+mn-lt"/>
-                <a:ea typeface="+mn-ea"/>
-                <a:cs typeface="+mn-cs"/>
-              </a:rPr>
-              <a:t>? </a:t>
-            </a:r>
-            <a:endParaRPr lang="ko-KR" altLang="en-US" sz="500" kern="1200" dirty="0">
-              <a:solidFill>
-                <a:schemeClr val="tx1"/>
-              </a:solidFill>
-              <a:effectLst/>
-              <a:latin typeface="+mn-lt"/>
-              <a:ea typeface="+mn-ea"/>
-              <a:cs typeface="+mn-cs"/>
-            </a:endParaRPr>
-          </a:p>
-          <a:p>
-            <a:pPr marL="0" marR="0" lvl="0" indent="0" algn="l" defTabSz="914400" rtl="0" eaLnBrk="1" fontAlgn="auto" latinLnBrk="1" hangingPunct="1">
-              <a:lnSpc>
-                <a:spcPct val="100000"/>
-              </a:lnSpc>
-              <a:spcBef>
-                <a:spcPts val="0"/>
-              </a:spcBef>
-              <a:spcAft>
-                <a:spcPts val="0"/>
-              </a:spcAft>
-              <a:buClrTx/>
-              <a:buSzTx/>
-              <a:buFontTx/>
-              <a:buNone/>
-              <a:tabLst/>
-              <a:defRPr/>
-            </a:pPr>
-            <a:r>
-              <a:rPr lang="en-US" altLang="ko-KR" sz="500" kern="1200" dirty="0">
-                <a:solidFill>
-                  <a:schemeClr val="tx1"/>
-                </a:solidFill>
-                <a:effectLst/>
-                <a:latin typeface="+mn-lt"/>
-                <a:ea typeface="+mn-ea"/>
-                <a:cs typeface="+mn-cs"/>
-              </a:rPr>
-              <a:t>"</a:t>
-            </a:r>
-            <a:r>
-              <a:rPr lang="ko-KR" altLang="en-US" sz="500" kern="1200" dirty="0">
-                <a:solidFill>
-                  <a:schemeClr val="tx1"/>
-                </a:solidFill>
-                <a:effectLst/>
-                <a:latin typeface="+mn-lt"/>
-                <a:ea typeface="+mn-ea"/>
-                <a:cs typeface="+mn-cs"/>
-              </a:rPr>
-              <a:t>최근 일주일 동안 협업하면서 서로에게 가장 많이 했던 말이 무엇인가요</a:t>
-            </a:r>
-            <a:r>
-              <a:rPr lang="en-US" altLang="ko-KR" sz="500" kern="1200" dirty="0">
-                <a:solidFill>
-                  <a:schemeClr val="tx1"/>
-                </a:solidFill>
-                <a:effectLst/>
-                <a:latin typeface="+mn-lt"/>
-                <a:ea typeface="+mn-ea"/>
-                <a:cs typeface="+mn-cs"/>
-              </a:rPr>
-              <a:t>? </a:t>
-            </a:r>
-            <a:r>
-              <a:rPr lang="ko-KR" altLang="en-US" sz="500" kern="1200" dirty="0">
-                <a:solidFill>
-                  <a:schemeClr val="tx1"/>
-                </a:solidFill>
-                <a:effectLst/>
-                <a:latin typeface="+mn-lt"/>
-                <a:ea typeface="+mn-ea"/>
-                <a:cs typeface="+mn-cs"/>
-              </a:rPr>
-              <a:t>혹시 그 말이 서로를 힘들게 하는 말은 아니었는지 오늘 함께 돌아보고자 합니다</a:t>
-            </a:r>
-            <a:r>
-              <a:rPr lang="en-US" altLang="ko-KR" sz="500" kern="1200" dirty="0">
-                <a:solidFill>
-                  <a:schemeClr val="tx1"/>
-                </a:solidFill>
-                <a:effectLst/>
-                <a:latin typeface="+mn-lt"/>
-                <a:ea typeface="+mn-ea"/>
-                <a:cs typeface="+mn-cs"/>
-              </a:rPr>
-              <a:t>.“</a:t>
-            </a:r>
-            <a:endParaRPr lang="ko-KR" altLang="en-US" sz="500" kern="1200" dirty="0">
-              <a:solidFill>
-                <a:schemeClr val="tx1"/>
-              </a:solidFill>
-              <a:effectLst/>
-              <a:latin typeface="+mn-lt"/>
-              <a:ea typeface="+mn-ea"/>
-              <a:cs typeface="+mn-cs"/>
-            </a:endParaRPr>
-          </a:p>
-          <a:p>
             <a:endParaRPr lang="ko-KR" altLang="en-US" sz="600" dirty="0"/>
           </a:p>
         </p:txBody>
@@ -4176,7 +1095,7 @@
     </p:spTree>
     <p:extLst>
       <p:ext uri="{BB962C8B-B14F-4D97-AF65-F5344CB8AC3E}">
-        <p14:creationId xmlns:p14="http://schemas.microsoft.com/office/powerpoint/2010/main" val="2978557951"/>
+        <p14:creationId xmlns:p14="http://schemas.microsoft.com/office/powerpoint/2010/main" val="2145199046"/>
       </p:ext>
     </p:extLst>
   </p:cSld>
@@ -4231,591 +1150,14 @@
           <a:lstStyle/>
           <a:p>
             <a:r>
-              <a:rPr lang="en-US" altLang="ko-KR" sz="800" dirty="0"/>
-              <a:t>"</a:t>
-            </a:r>
-            <a:r>
-              <a:rPr lang="ko-KR" altLang="en-US" sz="800" dirty="0"/>
-              <a:t>우리는 환자의 회복이라는 같은 목표를 가진 든든한 파트너입니다</a:t>
-            </a:r>
-            <a:r>
-              <a:rPr lang="en-US" altLang="ko-KR" sz="800" dirty="0"/>
-              <a:t>. </a:t>
-            </a:r>
-            <a:r>
-              <a:rPr lang="ko-KR" altLang="en-US" sz="800" dirty="0"/>
-              <a:t>하지만 현장의 바쁜 흐름 속에서 소통의 빈틈이 생길 때마다 마음이 </a:t>
-            </a:r>
-            <a:r>
-              <a:rPr lang="ko-KR" altLang="en-US" sz="800" dirty="0" err="1"/>
-              <a:t>무거우셨으리라</a:t>
-            </a:r>
-            <a:r>
-              <a:rPr lang="ko-KR" altLang="en-US" sz="800" dirty="0"/>
-              <a:t> 생각합니다</a:t>
-            </a:r>
-            <a:r>
-              <a:rPr lang="en-US" altLang="ko-KR" sz="800" dirty="0"/>
-              <a:t>. </a:t>
-            </a:r>
-            <a:r>
-              <a:rPr lang="ko-KR" altLang="en-US" sz="800" dirty="0"/>
-              <a:t>오늘 이 자리는</a:t>
-            </a:r>
-            <a:r>
-              <a:rPr lang="en-US" altLang="ko-KR" sz="800" dirty="0"/>
-              <a:t>, </a:t>
-            </a:r>
-            <a:r>
-              <a:rPr lang="ko-KR" altLang="en-US" sz="800" dirty="0"/>
-              <a:t>전문가로서의 자부심을 지키며 일할 수 있는 **‘우리만의 건강한 기준’**을 함께 고민해보기 위해 마련하였습니다</a:t>
-            </a:r>
-            <a:endParaRPr lang="en-US" altLang="ko-KR" sz="800" dirty="0"/>
-          </a:p>
-          <a:p>
-            <a:endParaRPr lang="en-US" altLang="ko-KR" sz="800" dirty="0"/>
-          </a:p>
-          <a:p>
-            <a:r>
-              <a:rPr lang="en-US" altLang="ko-KR" sz="800" dirty="0"/>
+              <a:rPr lang="ko-KR" altLang="en-US" dirty="0"/>
+              <a:t>바쁘신 와중에도 우리 모두의 더 나은 내일을 위해 함께해 주셔서 진심으로 감사합니다</a:t>
+            </a:r>
+            <a:r>
+              <a:rPr lang="en-US" altLang="ko-KR" dirty="0"/>
               <a:t>."</a:t>
             </a:r>
-            <a:r>
-              <a:rPr lang="ko-KR" altLang="en-US" sz="500" kern="1200" dirty="0">
-                <a:solidFill>
-                  <a:schemeClr val="tx1"/>
-                </a:solidFill>
-                <a:effectLst/>
-                <a:latin typeface="+mn-lt"/>
-                <a:ea typeface="+mn-ea"/>
-                <a:cs typeface="+mn-cs"/>
-              </a:rPr>
-              <a:t>본론으로 들어가기 전 가벼운 질문 하나 </a:t>
-            </a:r>
-            <a:r>
-              <a:rPr lang="ko-KR" altLang="en-US" sz="500" kern="1200" dirty="0" err="1">
-                <a:solidFill>
-                  <a:schemeClr val="tx1"/>
-                </a:solidFill>
-                <a:effectLst/>
-                <a:latin typeface="+mn-lt"/>
-                <a:ea typeface="+mn-ea"/>
-                <a:cs typeface="+mn-cs"/>
-              </a:rPr>
-              <a:t>드릴게요</a:t>
-            </a:r>
-            <a:r>
-              <a:rPr lang="en-US" altLang="ko-KR" sz="500" kern="1200" dirty="0">
-                <a:solidFill>
-                  <a:schemeClr val="tx1"/>
-                </a:solidFill>
-                <a:effectLst/>
-                <a:latin typeface="+mn-lt"/>
-                <a:ea typeface="+mn-ea"/>
-                <a:cs typeface="+mn-cs"/>
-              </a:rPr>
-              <a:t>. </a:t>
-            </a:r>
-            <a:r>
-              <a:rPr lang="ko-KR" altLang="en-US" sz="500" kern="1200" dirty="0">
-                <a:solidFill>
-                  <a:schemeClr val="tx1"/>
-                </a:solidFill>
-                <a:effectLst/>
-                <a:latin typeface="+mn-lt"/>
-                <a:ea typeface="+mn-ea"/>
-                <a:cs typeface="+mn-cs"/>
-              </a:rPr>
-              <a:t>오늘 업무하시면서 </a:t>
-            </a:r>
-            <a:r>
-              <a:rPr lang="en-US" altLang="ko-KR" sz="500" kern="1200" dirty="0">
-                <a:solidFill>
-                  <a:schemeClr val="tx1"/>
-                </a:solidFill>
-                <a:effectLst/>
-                <a:latin typeface="+mn-lt"/>
-                <a:ea typeface="+mn-ea"/>
-                <a:cs typeface="+mn-cs"/>
-              </a:rPr>
-              <a:t>PA </a:t>
-            </a:r>
-            <a:r>
-              <a:rPr lang="ko-KR" altLang="en-US" sz="500" kern="1200" dirty="0">
-                <a:solidFill>
-                  <a:schemeClr val="tx1"/>
-                </a:solidFill>
-                <a:effectLst/>
-                <a:latin typeface="+mn-lt"/>
-                <a:ea typeface="+mn-ea"/>
-                <a:cs typeface="+mn-cs"/>
-              </a:rPr>
-              <a:t>선생님 혹은 병동 선생님과 소통할 때</a:t>
-            </a:r>
-            <a:r>
-              <a:rPr lang="en-US" altLang="ko-KR" sz="500" kern="1200" dirty="0">
-                <a:solidFill>
-                  <a:schemeClr val="tx1"/>
-                </a:solidFill>
-                <a:effectLst/>
-                <a:latin typeface="+mn-lt"/>
-                <a:ea typeface="+mn-ea"/>
-                <a:cs typeface="+mn-cs"/>
-              </a:rPr>
-              <a:t>, </a:t>
-            </a:r>
-            <a:r>
-              <a:rPr lang="en-US" altLang="ko-KR" sz="500" b="1" kern="1200" dirty="0">
-                <a:solidFill>
-                  <a:schemeClr val="tx1"/>
-                </a:solidFill>
-                <a:effectLst/>
-                <a:latin typeface="+mn-lt"/>
-                <a:ea typeface="+mn-ea"/>
-                <a:cs typeface="+mn-cs"/>
-              </a:rPr>
-              <a:t>'</a:t>
-            </a:r>
-            <a:r>
-              <a:rPr lang="ko-KR" altLang="en-US" sz="500" b="1" kern="1200" dirty="0">
-                <a:solidFill>
-                  <a:schemeClr val="tx1"/>
-                </a:solidFill>
-                <a:effectLst/>
-                <a:latin typeface="+mn-lt"/>
-                <a:ea typeface="+mn-ea"/>
-                <a:cs typeface="+mn-cs"/>
-              </a:rPr>
-              <a:t>아</a:t>
-            </a:r>
-            <a:r>
-              <a:rPr lang="en-US" altLang="ko-KR" sz="500" b="1" kern="1200" dirty="0">
-                <a:solidFill>
-                  <a:schemeClr val="tx1"/>
-                </a:solidFill>
-                <a:effectLst/>
-                <a:latin typeface="+mn-lt"/>
-                <a:ea typeface="+mn-ea"/>
-                <a:cs typeface="+mn-cs"/>
-              </a:rPr>
-              <a:t>, </a:t>
-            </a:r>
-            <a:r>
-              <a:rPr lang="ko-KR" altLang="en-US" sz="500" b="1" kern="1200" dirty="0">
-                <a:solidFill>
-                  <a:schemeClr val="tx1"/>
-                </a:solidFill>
-                <a:effectLst/>
-                <a:latin typeface="+mn-lt"/>
-                <a:ea typeface="+mn-ea"/>
-                <a:cs typeface="+mn-cs"/>
-              </a:rPr>
-              <a:t>이 말</a:t>
-            </a:r>
-            <a:r>
-              <a:rPr lang="en-US" altLang="ko-KR" sz="500" b="1" kern="1200" dirty="0">
-                <a:solidFill>
-                  <a:schemeClr val="tx1"/>
-                </a:solidFill>
-                <a:effectLst/>
-                <a:latin typeface="+mn-lt"/>
-                <a:ea typeface="+mn-ea"/>
-                <a:cs typeface="+mn-cs"/>
-              </a:rPr>
-              <a:t>(</a:t>
-            </a:r>
-            <a:r>
-              <a:rPr lang="ko-KR" altLang="en-US" sz="500" b="1" kern="1200" dirty="0">
-                <a:solidFill>
-                  <a:schemeClr val="tx1"/>
-                </a:solidFill>
-                <a:effectLst/>
-                <a:latin typeface="+mn-lt"/>
-                <a:ea typeface="+mn-ea"/>
-                <a:cs typeface="+mn-cs"/>
-              </a:rPr>
-              <a:t>혹은 이 행동</a:t>
-            </a:r>
-            <a:r>
-              <a:rPr lang="en-US" altLang="ko-KR" sz="500" b="1" kern="1200" dirty="0">
-                <a:solidFill>
-                  <a:schemeClr val="tx1"/>
-                </a:solidFill>
-                <a:effectLst/>
-                <a:latin typeface="+mn-lt"/>
-                <a:ea typeface="+mn-ea"/>
-                <a:cs typeface="+mn-cs"/>
-              </a:rPr>
-              <a:t>) </a:t>
-            </a:r>
-            <a:r>
-              <a:rPr lang="ko-KR" altLang="en-US" sz="500" b="1" kern="1200" dirty="0">
-                <a:solidFill>
-                  <a:schemeClr val="tx1"/>
-                </a:solidFill>
-                <a:effectLst/>
-                <a:latin typeface="+mn-lt"/>
-                <a:ea typeface="+mn-ea"/>
-                <a:cs typeface="+mn-cs"/>
-              </a:rPr>
-              <a:t>덕분에 한결 수월했다</a:t>
-            </a:r>
-            <a:r>
-              <a:rPr lang="en-US" altLang="ko-KR" sz="500" b="1" kern="1200" dirty="0">
-                <a:solidFill>
-                  <a:schemeClr val="tx1"/>
-                </a:solidFill>
-                <a:effectLst/>
-                <a:latin typeface="+mn-lt"/>
-                <a:ea typeface="+mn-ea"/>
-                <a:cs typeface="+mn-cs"/>
-              </a:rPr>
-              <a:t>!'</a:t>
-            </a:r>
-            <a:r>
-              <a:rPr lang="ko-KR" altLang="en-US" sz="500" kern="1200" dirty="0">
-                <a:solidFill>
-                  <a:schemeClr val="tx1"/>
-                </a:solidFill>
-                <a:effectLst/>
-                <a:latin typeface="+mn-lt"/>
-                <a:ea typeface="+mn-ea"/>
-                <a:cs typeface="+mn-cs"/>
-              </a:rPr>
-              <a:t>싶었던 순간이 </a:t>
-            </a:r>
-            <a:r>
-              <a:rPr lang="en-US" altLang="ko-KR" sz="500" kern="1200" dirty="0">
-                <a:solidFill>
-                  <a:schemeClr val="tx1"/>
-                </a:solidFill>
-                <a:effectLst/>
-                <a:latin typeface="+mn-lt"/>
-                <a:ea typeface="+mn-ea"/>
-                <a:cs typeface="+mn-cs"/>
-              </a:rPr>
-              <a:t>1</a:t>
-            </a:r>
-            <a:r>
-              <a:rPr lang="ko-KR" altLang="en-US" sz="500" kern="1200" dirty="0">
-                <a:solidFill>
-                  <a:schemeClr val="tx1"/>
-                </a:solidFill>
-                <a:effectLst/>
-                <a:latin typeface="+mn-lt"/>
-                <a:ea typeface="+mn-ea"/>
-                <a:cs typeface="+mn-cs"/>
-              </a:rPr>
-              <a:t>초라도 있으셨나요</a:t>
-            </a:r>
-            <a:r>
-              <a:rPr lang="en-US" altLang="ko-KR" sz="500" kern="1200" dirty="0">
-                <a:solidFill>
-                  <a:schemeClr val="tx1"/>
-                </a:solidFill>
-                <a:effectLst/>
-                <a:latin typeface="+mn-lt"/>
-                <a:ea typeface="+mn-ea"/>
-                <a:cs typeface="+mn-cs"/>
-              </a:rPr>
-              <a:t>?“</a:t>
-            </a:r>
-            <a:endParaRPr lang="ko-KR" altLang="en-US" sz="500" kern="1200" dirty="0">
-              <a:solidFill>
-                <a:schemeClr val="tx1"/>
-              </a:solidFill>
-              <a:effectLst/>
-              <a:latin typeface="+mn-lt"/>
-              <a:ea typeface="+mn-ea"/>
-              <a:cs typeface="+mn-cs"/>
-            </a:endParaRPr>
-          </a:p>
-          <a:p>
-            <a:pPr marL="0" marR="0" lvl="0" indent="0" algn="l" defTabSz="914400" rtl="0" eaLnBrk="1" fontAlgn="auto" latinLnBrk="1" hangingPunct="1">
-              <a:lnSpc>
-                <a:spcPct val="100000"/>
-              </a:lnSpc>
-              <a:spcBef>
-                <a:spcPts val="0"/>
-              </a:spcBef>
-              <a:spcAft>
-                <a:spcPts val="0"/>
-              </a:spcAft>
-              <a:buClrTx/>
-              <a:buSzTx/>
-              <a:buFontTx/>
-              <a:buNone/>
-              <a:tabLst/>
-              <a:defRPr/>
-            </a:pPr>
-            <a:r>
-              <a:rPr lang="ko-KR" altLang="en-US" sz="500" kern="1200" dirty="0">
-                <a:solidFill>
-                  <a:schemeClr val="tx1"/>
-                </a:solidFill>
-                <a:effectLst/>
-                <a:latin typeface="+mn-lt"/>
-                <a:ea typeface="+mn-ea"/>
-                <a:cs typeface="+mn-cs"/>
-              </a:rPr>
-              <a:t>우리 </a:t>
-            </a:r>
-            <a:r>
-              <a:rPr lang="ko-KR" altLang="en-US" sz="500" kern="1200" dirty="0" err="1">
-                <a:solidFill>
-                  <a:schemeClr val="tx1"/>
-                </a:solidFill>
-                <a:effectLst/>
-                <a:latin typeface="+mn-lt"/>
-                <a:ea typeface="+mn-ea"/>
-                <a:cs typeface="+mn-cs"/>
-              </a:rPr>
-              <a:t>팀명이</a:t>
-            </a:r>
-            <a:r>
-              <a:rPr lang="ko-KR" altLang="en-US" sz="500" kern="1200" dirty="0">
-                <a:solidFill>
-                  <a:schemeClr val="tx1"/>
-                </a:solidFill>
-                <a:effectLst/>
-                <a:latin typeface="+mn-lt"/>
-                <a:ea typeface="+mn-ea"/>
-                <a:cs typeface="+mn-cs"/>
-              </a:rPr>
-              <a:t> </a:t>
-            </a:r>
-            <a:r>
-              <a:rPr lang="en-US" altLang="ko-KR" sz="500" kern="1200" dirty="0">
-                <a:solidFill>
-                  <a:schemeClr val="tx1"/>
-                </a:solidFill>
-                <a:effectLst/>
-                <a:latin typeface="+mn-lt"/>
-                <a:ea typeface="+mn-ea"/>
-                <a:cs typeface="+mn-cs"/>
-              </a:rPr>
-              <a:t>'</a:t>
-            </a:r>
-            <a:r>
-              <a:rPr lang="ko-KR" altLang="en-US" sz="500" kern="1200" dirty="0" err="1">
-                <a:solidFill>
-                  <a:schemeClr val="tx1"/>
-                </a:solidFill>
-                <a:effectLst/>
-                <a:latin typeface="+mn-lt"/>
-                <a:ea typeface="+mn-ea"/>
-                <a:cs typeface="+mn-cs"/>
-              </a:rPr>
-              <a:t>우리가치</a:t>
-            </a:r>
-            <a:r>
-              <a:rPr lang="en-US" altLang="ko-KR" sz="500" kern="1200" dirty="0">
-                <a:solidFill>
-                  <a:schemeClr val="tx1"/>
-                </a:solidFill>
-                <a:effectLst/>
-                <a:latin typeface="+mn-lt"/>
-                <a:ea typeface="+mn-ea"/>
-                <a:cs typeface="+mn-cs"/>
-              </a:rPr>
-              <a:t>'</a:t>
-            </a:r>
-            <a:r>
-              <a:rPr lang="ko-KR" altLang="en-US" sz="500" kern="1200" dirty="0">
-                <a:solidFill>
-                  <a:schemeClr val="tx1"/>
-                </a:solidFill>
-                <a:effectLst/>
-                <a:latin typeface="+mn-lt"/>
-                <a:ea typeface="+mn-ea"/>
-                <a:cs typeface="+mn-cs"/>
-              </a:rPr>
-              <a:t>인 만큼 여쭤보고 싶습니다</a:t>
-            </a:r>
-            <a:r>
-              <a:rPr lang="en-US" altLang="ko-KR" sz="500" kern="1200" dirty="0">
-                <a:solidFill>
-                  <a:schemeClr val="tx1"/>
-                </a:solidFill>
-                <a:effectLst/>
-                <a:latin typeface="+mn-lt"/>
-                <a:ea typeface="+mn-ea"/>
-                <a:cs typeface="+mn-cs"/>
-              </a:rPr>
-              <a:t>. </a:t>
-            </a:r>
-            <a:r>
-              <a:rPr lang="ko-KR" altLang="en-US" sz="500" kern="1200" dirty="0">
-                <a:solidFill>
-                  <a:schemeClr val="tx1"/>
-                </a:solidFill>
-                <a:effectLst/>
-                <a:latin typeface="+mn-lt"/>
-                <a:ea typeface="+mn-ea"/>
-                <a:cs typeface="+mn-cs"/>
-              </a:rPr>
-              <a:t>선생님들이 생각하시기에 **</a:t>
-            </a:r>
-            <a:r>
-              <a:rPr lang="en-US" altLang="ko-KR" sz="500" kern="1200" dirty="0">
-                <a:solidFill>
-                  <a:schemeClr val="tx1"/>
-                </a:solidFill>
-                <a:effectLst/>
-                <a:latin typeface="+mn-lt"/>
-                <a:ea typeface="+mn-ea"/>
-                <a:cs typeface="+mn-cs"/>
-              </a:rPr>
-              <a:t>'</a:t>
-            </a:r>
-            <a:r>
-              <a:rPr lang="ko-KR" altLang="en-US" sz="500" kern="1200" dirty="0">
-                <a:solidFill>
-                  <a:schemeClr val="tx1"/>
-                </a:solidFill>
-                <a:effectLst/>
-                <a:latin typeface="+mn-lt"/>
-                <a:ea typeface="+mn-ea"/>
-                <a:cs typeface="+mn-cs"/>
-              </a:rPr>
-              <a:t>정말 기분 좋은 협업</a:t>
-            </a:r>
-            <a:r>
-              <a:rPr lang="en-US" altLang="ko-KR" sz="500" kern="1200" dirty="0">
-                <a:solidFill>
-                  <a:schemeClr val="tx1"/>
-                </a:solidFill>
-                <a:effectLst/>
-                <a:latin typeface="+mn-lt"/>
-                <a:ea typeface="+mn-ea"/>
-                <a:cs typeface="+mn-cs"/>
-              </a:rPr>
-              <a:t>'**</a:t>
-            </a:r>
-            <a:r>
-              <a:rPr lang="ko-KR" altLang="en-US" sz="500" kern="1200" dirty="0">
-                <a:solidFill>
-                  <a:schemeClr val="tx1"/>
-                </a:solidFill>
-                <a:effectLst/>
-                <a:latin typeface="+mn-lt"/>
-                <a:ea typeface="+mn-ea"/>
-                <a:cs typeface="+mn-cs"/>
-              </a:rPr>
-              <a:t>을 한 문장이나 단어로 표현한다면 무엇일까요</a:t>
-            </a:r>
-            <a:r>
-              <a:rPr lang="en-US" altLang="ko-KR" sz="500" kern="1200" dirty="0">
-                <a:solidFill>
-                  <a:schemeClr val="tx1"/>
-                </a:solidFill>
-                <a:effectLst/>
-                <a:latin typeface="+mn-lt"/>
-                <a:ea typeface="+mn-ea"/>
-                <a:cs typeface="+mn-cs"/>
-              </a:rPr>
-              <a:t>? </a:t>
-            </a:r>
-            <a:endParaRPr lang="ko-KR" altLang="en-US" sz="500" kern="1200" dirty="0">
-              <a:solidFill>
-                <a:schemeClr val="tx1"/>
-              </a:solidFill>
-              <a:effectLst/>
-              <a:latin typeface="+mn-lt"/>
-              <a:ea typeface="+mn-ea"/>
-              <a:cs typeface="+mn-cs"/>
-            </a:endParaRPr>
-          </a:p>
-          <a:p>
-            <a:pPr marL="0" marR="0" lvl="0" indent="0" algn="l" defTabSz="914400" rtl="0" eaLnBrk="1" fontAlgn="auto" latinLnBrk="1" hangingPunct="1">
-              <a:lnSpc>
-                <a:spcPct val="100000"/>
-              </a:lnSpc>
-              <a:spcBef>
-                <a:spcPts val="0"/>
-              </a:spcBef>
-              <a:spcAft>
-                <a:spcPts val="0"/>
-              </a:spcAft>
-              <a:buClrTx/>
-              <a:buSzTx/>
-              <a:buFontTx/>
-              <a:buNone/>
-              <a:tabLst/>
-              <a:defRPr/>
-            </a:pPr>
-            <a:r>
-              <a:rPr lang="en-US" altLang="ko-KR" sz="500" kern="1200" dirty="0">
-                <a:solidFill>
-                  <a:schemeClr val="tx1"/>
-                </a:solidFill>
-                <a:effectLst/>
-                <a:latin typeface="+mn-lt"/>
-                <a:ea typeface="+mn-ea"/>
-                <a:cs typeface="+mn-cs"/>
-              </a:rPr>
-              <a:t>"</a:t>
-            </a:r>
-            <a:r>
-              <a:rPr lang="ko-KR" altLang="en-US" sz="500" kern="1200" dirty="0">
-                <a:solidFill>
-                  <a:schemeClr val="tx1"/>
-                </a:solidFill>
-                <a:effectLst/>
-                <a:latin typeface="+mn-lt"/>
-                <a:ea typeface="+mn-ea"/>
-                <a:cs typeface="+mn-cs"/>
-              </a:rPr>
-              <a:t>최근 일주일 동안 협업하면서 서로에게 가장 많이 했던 말이 무엇인가요</a:t>
-            </a:r>
-            <a:r>
-              <a:rPr lang="en-US" altLang="ko-KR" sz="500" kern="1200" dirty="0">
-                <a:solidFill>
-                  <a:schemeClr val="tx1"/>
-                </a:solidFill>
-                <a:effectLst/>
-                <a:latin typeface="+mn-lt"/>
-                <a:ea typeface="+mn-ea"/>
-                <a:cs typeface="+mn-cs"/>
-              </a:rPr>
-              <a:t>? </a:t>
-            </a:r>
-            <a:r>
-              <a:rPr lang="ko-KR" altLang="en-US" sz="500" kern="1200" dirty="0">
-                <a:solidFill>
-                  <a:schemeClr val="tx1"/>
-                </a:solidFill>
-                <a:effectLst/>
-                <a:latin typeface="+mn-lt"/>
-                <a:ea typeface="+mn-ea"/>
-                <a:cs typeface="+mn-cs"/>
-              </a:rPr>
-              <a:t>혹시 그 말이 서로를 힘들게 하는 말은 아니었는지 오늘 함께 돌아보고자 합니다</a:t>
-            </a:r>
-            <a:r>
-              <a:rPr lang="en-US" altLang="ko-KR" sz="500" kern="1200" dirty="0">
-                <a:solidFill>
-                  <a:schemeClr val="tx1"/>
-                </a:solidFill>
-                <a:effectLst/>
-                <a:latin typeface="+mn-lt"/>
-                <a:ea typeface="+mn-ea"/>
-                <a:cs typeface="+mn-cs"/>
-              </a:rPr>
-              <a:t>.“</a:t>
-            </a:r>
-            <a:endParaRPr lang="ko-KR" altLang="en-US" sz="500" kern="1200" dirty="0">
-              <a:solidFill>
-                <a:schemeClr val="tx1"/>
-              </a:solidFill>
-              <a:effectLst/>
-              <a:latin typeface="+mn-lt"/>
-              <a:ea typeface="+mn-ea"/>
-              <a:cs typeface="+mn-cs"/>
-            </a:endParaRPr>
-          </a:p>
-          <a:p>
-            <a:endParaRPr lang="ko-KR" altLang="en-US" sz="600" dirty="0"/>
+            <a:endParaRPr lang="ko-KR" altLang="en-US" dirty="0"/>
           </a:p>
         </p:txBody>
       </p:sp>
@@ -4837,106 +1179,6 @@
             <a:fld id="{344A9A12-E110-4E26-8834-B65FA9FF0C55}" type="slidenum">
               <a:rPr lang="ko-KR" altLang="en-US" smtClean="0"/>
               <a:t>8</a:t>
-            </a:fld>
-            <a:endParaRPr lang="ko-KR" altLang="en-US"/>
-          </a:p>
-        </p:txBody>
-      </p:sp>
-    </p:spTree>
-    <p:extLst>
-      <p:ext uri="{BB962C8B-B14F-4D97-AF65-F5344CB8AC3E}">
-        <p14:creationId xmlns:p14="http://schemas.microsoft.com/office/powerpoint/2010/main" val="2145199046"/>
-      </p:ext>
-    </p:extLst>
-  </p:cSld>
-  <p:clrMapOvr>
-    <a:masterClrMapping/>
-  </p:clrMapOvr>
-</p:notes>
-</file>
-
-<file path=ppt/notesSlides/notesSlide9.xml><?xml version="1.0" encoding="utf-8"?>
-<p:notes xmlns:a="http://schemas.openxmlformats.org/drawingml/2006/main" xmlns:r="http://schemas.openxmlformats.org/officeDocument/2006/relationships" xmlns:p="http://schemas.openxmlformats.org/presentationml/2006/main">
-  <p:cSld>
-    <p:spTree>
-      <p:nvGrpSpPr>
-        <p:cNvPr id="1" name=""/>
-        <p:cNvGrpSpPr/>
-        <p:nvPr/>
-      </p:nvGrpSpPr>
-      <p:grpSpPr>
-        <a:xfrm>
-          <a:off x="0" y="0"/>
-          <a:ext cx="0" cy="0"/>
-          <a:chOff x="0" y="0"/>
-          <a:chExt cx="0" cy="0"/>
-        </a:xfrm>
-      </p:grpSpPr>
-      <p:sp>
-        <p:nvSpPr>
-          <p:cNvPr id="2" name="슬라이드 이미지 개체 틀 1"/>
-          <p:cNvSpPr>
-            <a:spLocks noGrp="1" noRot="1" noChangeAspect="1"/>
-          </p:cNvSpPr>
-          <p:nvPr>
-            <p:ph type="sldImg"/>
-          </p:nvPr>
-        </p:nvSpPr>
-        <p:spPr/>
-      </p:sp>
-      <p:sp>
-        <p:nvSpPr>
-          <p:cNvPr id="3" name="슬라이드 노트 개체 틀 2"/>
-          <p:cNvSpPr>
-            <a:spLocks noGrp="1"/>
-          </p:cNvSpPr>
-          <p:nvPr>
-            <p:ph type="body" idx="1"/>
-          </p:nvPr>
-        </p:nvSpPr>
-        <p:spPr/>
-        <p:txBody>
-          <a:bodyPr/>
-          <a:lstStyle/>
-          <a:p>
-            <a:r>
-              <a:rPr lang="ko-KR" altLang="en-US" dirty="0"/>
-              <a:t>바쁘신 와중에도 우리 모두의 더 나은 내일을 위해 </a:t>
-            </a:r>
-            <a:r>
-              <a:rPr lang="ko-KR" altLang="en-US" dirty="0" err="1"/>
-              <a:t>함께해주셔서</a:t>
-            </a:r>
-            <a:r>
-              <a:rPr lang="ko-KR" altLang="en-US" dirty="0"/>
-              <a:t> 진심으로 감사합니다</a:t>
-            </a:r>
-            <a:r>
-              <a:rPr lang="en-US" altLang="ko-KR" dirty="0"/>
-              <a:t>."</a:t>
-            </a:r>
-            <a:endParaRPr lang="ko-KR" altLang="en-US" dirty="0"/>
-          </a:p>
-        </p:txBody>
-      </p:sp>
-      <p:sp>
-        <p:nvSpPr>
-          <p:cNvPr id="4" name="슬라이드 번호 개체 틀 3"/>
-          <p:cNvSpPr>
-            <a:spLocks noGrp="1"/>
-          </p:cNvSpPr>
-          <p:nvPr>
-            <p:ph type="sldNum" sz="quarter" idx="5"/>
-          </p:nvPr>
-        </p:nvSpPr>
-        <p:spPr/>
-        <p:txBody>
-          <a:bodyPr/>
-          <a:lstStyle/>
-          <a:p>
-            <a:fld id="{344A9A12-E110-4E26-8834-B65FA9FF0C55}" type="slidenum">
-              <a:rPr lang="ko-KR" altLang="en-US" smtClean="0"/>
-              <a:t>9</a:t>
             </a:fld>
             <a:endParaRPr lang="ko-KR" altLang="en-US"/>
           </a:p>
@@ -7817,42 +4059,10 @@
       </p:grpSpPr>
       <p:sp>
         <p:nvSpPr>
-          <p:cNvPr id="2" name="제목 1">
+          <p:cNvPr id="37" name="사각형: 둥근 모서리 36">
             <a:extLst>
               <a:ext uri="{FF2B5EF4-FFF2-40B4-BE49-F238E27FC236}">
-                <a16:creationId xmlns:a16="http://schemas.microsoft.com/office/drawing/2014/main" id="{E8D51D1B-0DB5-A282-D99E-57AC7CC3D2E1}"/>
-              </a:ext>
-            </a:extLst>
-          </p:cNvPr>
-          <p:cNvSpPr>
-            <a:spLocks noGrp="1"/>
-          </p:cNvSpPr>
-          <p:nvPr>
-            <p:ph type="title"/>
-          </p:nvPr>
-        </p:nvSpPr>
-        <p:spPr/>
-        <p:txBody>
-          <a:bodyPr/>
-          <a:lstStyle/>
-          <a:p>
-            <a:r>
-              <a:rPr lang="en-US" altLang="ko-KR" dirty="0"/>
-              <a:t>2. </a:t>
-            </a:r>
-            <a:r>
-              <a:rPr lang="ko-KR" altLang="en-US" dirty="0"/>
-              <a:t>활동의 필요성</a:t>
-            </a:r>
-          </a:p>
-        </p:txBody>
-      </p:sp>
-      <p:sp>
-        <p:nvSpPr>
-          <p:cNvPr id="19" name="사각형: 둥근 모서리 18">
-            <a:extLst>
-              <a:ext uri="{FF2B5EF4-FFF2-40B4-BE49-F238E27FC236}">
-                <a16:creationId xmlns:a16="http://schemas.microsoft.com/office/drawing/2014/main" id="{1DA73313-446B-4E4F-9DCC-D03B975596D8}"/>
+                <a16:creationId xmlns:a16="http://schemas.microsoft.com/office/drawing/2014/main" id="{6EE7A876-3856-48D2-8279-BA97EACA7252}"/>
               </a:ext>
             </a:extLst>
           </p:cNvPr>
@@ -7861,24 +4071,13 @@
         </p:nvSpPr>
         <p:spPr>
           <a:xfrm>
-            <a:off x="1049909" y="1995176"/>
-            <a:ext cx="3212998" cy="2415838"/>
+            <a:off x="1049628" y="2086377"/>
+            <a:ext cx="4932609" cy="1165538"/>
           </a:xfrm>
           <a:prstGeom prst="roundRect">
-            <a:avLst>
-              <a:gd name="adj" fmla="val 4426"/>
-            </a:avLst>
+            <a:avLst/>
           </a:prstGeom>
-          <a:solidFill>
-            <a:schemeClr val="bg1"/>
-          </a:solidFill>
-          <a:ln>
-            <a:solidFill>
-              <a:schemeClr val="bg1">
-                <a:lumMod val="95000"/>
-              </a:schemeClr>
-            </a:solidFill>
-          </a:ln>
+          <a:noFill/>
         </p:spPr>
         <p:style>
           <a:lnRef idx="2">
@@ -7907,45 +4106,10 @@
       </p:sp>
       <p:sp>
         <p:nvSpPr>
-          <p:cNvPr id="22" name="TextBox 21">
+          <p:cNvPr id="38" name="사각형: 둥근 모서리 37">
             <a:extLst>
               <a:ext uri="{FF2B5EF4-FFF2-40B4-BE49-F238E27FC236}">
-                <a16:creationId xmlns:a16="http://schemas.microsoft.com/office/drawing/2014/main" id="{DA422C8E-2DCE-4B6A-9A5A-71EC81E54013}"/>
-              </a:ext>
-            </a:extLst>
-          </p:cNvPr>
-          <p:cNvSpPr txBox="1"/>
-          <p:nvPr/>
-        </p:nvSpPr>
-        <p:spPr>
-          <a:xfrm>
-            <a:off x="5265929" y="1546781"/>
-            <a:ext cx="1733167" cy="369332"/>
-          </a:xfrm>
-          <a:prstGeom prst="rect">
-            <a:avLst/>
-          </a:prstGeom>
-          <a:noFill/>
-        </p:spPr>
-        <p:txBody>
-          <a:bodyPr wrap="none" rtlCol="0">
-            <a:spAutoFit/>
-          </a:bodyPr>
-          <a:lstStyle/>
-          <a:p>
-            <a:r>
-              <a:rPr lang="ko-KR" altLang="en-US"/>
-              <a:t>배경 및 필요성</a:t>
-            </a:r>
-          </a:p>
-        </p:txBody>
-      </p:sp>
-      <p:sp>
-        <p:nvSpPr>
-          <p:cNvPr id="23" name="사각형: 둥근 모서리 22">
-            <a:extLst>
-              <a:ext uri="{FF2B5EF4-FFF2-40B4-BE49-F238E27FC236}">
-                <a16:creationId xmlns:a16="http://schemas.microsoft.com/office/drawing/2014/main" id="{E1F2E35D-B748-49EC-BF87-AE82DE3B0856}"/>
+                <a16:creationId xmlns:a16="http://schemas.microsoft.com/office/drawing/2014/main" id="{14C3D646-E1C7-43C6-87D1-5DCD68157112}"/>
               </a:ext>
             </a:extLst>
           </p:cNvPr>
@@ -7954,24 +4118,13 @@
         </p:nvSpPr>
         <p:spPr>
           <a:xfrm>
-            <a:off x="4526014" y="1995176"/>
-            <a:ext cx="3212998" cy="2415838"/>
+            <a:off x="1049628" y="3322749"/>
+            <a:ext cx="4932609" cy="1165538"/>
           </a:xfrm>
           <a:prstGeom prst="roundRect">
-            <a:avLst>
-              <a:gd name="adj" fmla="val 4426"/>
-            </a:avLst>
+            <a:avLst/>
           </a:prstGeom>
-          <a:solidFill>
-            <a:schemeClr val="bg1"/>
-          </a:solidFill>
-          <a:ln>
-            <a:solidFill>
-              <a:schemeClr val="bg1">
-                <a:lumMod val="95000"/>
-              </a:schemeClr>
-            </a:solidFill>
-          </a:ln>
+          <a:noFill/>
         </p:spPr>
         <p:style>
           <a:lnRef idx="2">
@@ -8000,10 +4153,10 @@
       </p:sp>
       <p:sp>
         <p:nvSpPr>
-          <p:cNvPr id="24" name="사각형: 둥근 모서리 23">
+          <p:cNvPr id="39" name="사각형: 둥근 모서리 38">
             <a:extLst>
               <a:ext uri="{FF2B5EF4-FFF2-40B4-BE49-F238E27FC236}">
-                <a16:creationId xmlns:a16="http://schemas.microsoft.com/office/drawing/2014/main" id="{34C2EC33-39C0-4222-B895-A5FDA3D807FD}"/>
+                <a16:creationId xmlns:a16="http://schemas.microsoft.com/office/drawing/2014/main" id="{5808EF35-B4EE-4EB8-82D9-87714203E7C8}"/>
               </a:ext>
             </a:extLst>
           </p:cNvPr>
@@ -8012,24 +4165,13 @@
         </p:nvSpPr>
         <p:spPr>
           <a:xfrm>
-            <a:off x="8081775" y="1995176"/>
-            <a:ext cx="3212998" cy="2415838"/>
+            <a:off x="1049628" y="4559120"/>
+            <a:ext cx="4932609" cy="1165538"/>
           </a:xfrm>
           <a:prstGeom prst="roundRect">
-            <a:avLst>
-              <a:gd name="adj" fmla="val 4426"/>
-            </a:avLst>
+            <a:avLst/>
           </a:prstGeom>
-          <a:solidFill>
-            <a:schemeClr val="bg1"/>
-          </a:solidFill>
-          <a:ln>
-            <a:solidFill>
-              <a:schemeClr val="bg1">
-                <a:lumMod val="95000"/>
-              </a:schemeClr>
-            </a:solidFill>
-          </a:ln>
+          <a:noFill/>
         </p:spPr>
         <p:style>
           <a:lnRef idx="2">
@@ -8058,6 +4200,73 @@
       </p:sp>
       <p:sp>
         <p:nvSpPr>
+          <p:cNvPr id="2" name="제목 1">
+            <a:extLst>
+              <a:ext uri="{FF2B5EF4-FFF2-40B4-BE49-F238E27FC236}">
+                <a16:creationId xmlns:a16="http://schemas.microsoft.com/office/drawing/2014/main" id="{E8D51D1B-0DB5-A282-D99E-57AC7CC3D2E1}"/>
+              </a:ext>
+            </a:extLst>
+          </p:cNvPr>
+          <p:cNvSpPr>
+            <a:spLocks noGrp="1"/>
+          </p:cNvSpPr>
+          <p:nvPr>
+            <p:ph type="title"/>
+          </p:nvPr>
+        </p:nvSpPr>
+        <p:spPr/>
+        <p:txBody>
+          <a:bodyPr/>
+          <a:lstStyle/>
+          <a:p>
+            <a:r>
+              <a:rPr lang="en-US" altLang="ko-KR" dirty="0"/>
+              <a:t>2. </a:t>
+            </a:r>
+            <a:r>
+              <a:rPr lang="ko-KR" altLang="en-US" dirty="0"/>
+              <a:t>활동의 필요성</a:t>
+            </a:r>
+          </a:p>
+        </p:txBody>
+      </p:sp>
+      <p:sp>
+        <p:nvSpPr>
+          <p:cNvPr id="22" name="TextBox 21">
+            <a:extLst>
+              <a:ext uri="{FF2B5EF4-FFF2-40B4-BE49-F238E27FC236}">
+                <a16:creationId xmlns:a16="http://schemas.microsoft.com/office/drawing/2014/main" id="{DA422C8E-2DCE-4B6A-9A5A-71EC81E54013}"/>
+              </a:ext>
+            </a:extLst>
+          </p:cNvPr>
+          <p:cNvSpPr txBox="1"/>
+          <p:nvPr/>
+        </p:nvSpPr>
+        <p:spPr>
+          <a:xfrm>
+            <a:off x="4782972" y="1237688"/>
+            <a:ext cx="1733167" cy="369332"/>
+          </a:xfrm>
+          <a:prstGeom prst="rect">
+            <a:avLst/>
+          </a:prstGeom>
+          <a:noFill/>
+        </p:spPr>
+        <p:txBody>
+          <a:bodyPr wrap="none" rtlCol="0">
+            <a:spAutoFit/>
+          </a:bodyPr>
+          <a:lstStyle/>
+          <a:p>
+            <a:r>
+              <a:rPr lang="ko-KR" altLang="en-US"/>
+              <a:t>배경 및 필요성</a:t>
+            </a:r>
+          </a:p>
+        </p:txBody>
+      </p:sp>
+      <p:sp>
+        <p:nvSpPr>
           <p:cNvPr id="25" name="TextBox 24">
             <a:extLst>
               <a:ext uri="{FF2B5EF4-FFF2-40B4-BE49-F238E27FC236}">
@@ -8070,8 +4279,8 @@
         </p:nvSpPr>
         <p:spPr>
           <a:xfrm>
-            <a:off x="1590540" y="2643389"/>
-            <a:ext cx="1963999" cy="369332"/>
+            <a:off x="1204174" y="2499869"/>
+            <a:ext cx="1848583" cy="338554"/>
           </a:xfrm>
           <a:prstGeom prst="rect">
             <a:avLst/>
@@ -8084,8 +4293,15 @@
           </a:bodyPr>
           <a:lstStyle/>
           <a:p>
-            <a:r>
-              <a:rPr lang="ko-KR" altLang="en-US" dirty="0"/>
+            <a:pPr marL="285750" indent="-285750">
+              <a:buFont typeface="Wingdings" panose="05000000000000000000" pitchFamily="2" charset="2"/>
+              <a:buChar char="l"/>
+            </a:pPr>
+            <a:r>
+              <a:rPr lang="ko-KR" altLang="en-US" sz="1600" b="1" dirty="0">
+                <a:latin typeface="KoPub돋움체 Light" panose="00000300000000000000" pitchFamily="2" charset="-127"/>
+                <a:ea typeface="KoPub돋움체 Light" panose="00000300000000000000" pitchFamily="2" charset="-127"/>
+              </a:rPr>
               <a:t>의료 환경의 변화</a:t>
             </a:r>
           </a:p>
@@ -8105,8 +4321,8 @@
         </p:nvSpPr>
         <p:spPr>
           <a:xfrm>
-            <a:off x="1590540" y="3429000"/>
-            <a:ext cx="2839175" cy="646331"/>
+            <a:off x="3387143" y="2376759"/>
+            <a:ext cx="2292422" cy="584775"/>
           </a:xfrm>
           <a:prstGeom prst="rect">
             <a:avLst/>
@@ -8120,18 +4336,30 @@
           <a:lstStyle/>
           <a:p>
             <a:r>
-              <a:rPr lang="en-US" altLang="ko-KR" dirty="0"/>
+              <a:rPr lang="en-US" altLang="ko-KR" sz="1600" dirty="0">
+                <a:latin typeface="KoPub돋움체 Light" panose="00000300000000000000" pitchFamily="2" charset="-127"/>
+                <a:ea typeface="KoPub돋움체 Light" panose="00000300000000000000" pitchFamily="2" charset="-127"/>
+              </a:rPr>
               <a:t>PA</a:t>
             </a:r>
             <a:r>
-              <a:rPr lang="ko-KR" altLang="en-US" dirty="0"/>
+              <a:rPr lang="ko-KR" altLang="en-US" sz="1600" dirty="0">
+                <a:latin typeface="KoPub돋움체 Light" panose="00000300000000000000" pitchFamily="2" charset="-127"/>
+                <a:ea typeface="KoPub돋움체 Light" panose="00000300000000000000" pitchFamily="2" charset="-127"/>
+              </a:rPr>
               <a:t>간호사와 병동간호사의</a:t>
             </a:r>
-            <a:endParaRPr lang="en-US" altLang="ko-KR" dirty="0"/>
-          </a:p>
-          <a:p>
-            <a:r>
-              <a:rPr lang="ko-KR" altLang="en-US" dirty="0"/>
+            <a:endParaRPr lang="en-US" altLang="ko-KR" sz="1600" dirty="0">
+              <a:latin typeface="KoPub돋움체 Light" panose="00000300000000000000" pitchFamily="2" charset="-127"/>
+              <a:ea typeface="KoPub돋움체 Light" panose="00000300000000000000" pitchFamily="2" charset="-127"/>
+            </a:endParaRPr>
+          </a:p>
+          <a:p>
+            <a:r>
+              <a:rPr lang="ko-KR" altLang="en-US" sz="1600" dirty="0">
+                <a:latin typeface="KoPub돋움체 Light" panose="00000300000000000000" pitchFamily="2" charset="-127"/>
+                <a:ea typeface="KoPub돋움체 Light" panose="00000300000000000000" pitchFamily="2" charset="-127"/>
+              </a:rPr>
               <a:t>협업 중요성 증대</a:t>
             </a:r>
           </a:p>
@@ -8151,8 +4379,8 @@
         </p:nvSpPr>
         <p:spPr>
           <a:xfrm>
-            <a:off x="4784501" y="2643389"/>
-            <a:ext cx="2507418" cy="369332"/>
+            <a:off x="1204174" y="3736241"/>
+            <a:ext cx="2266967" cy="338554"/>
           </a:xfrm>
           <a:prstGeom prst="rect">
             <a:avLst/>
@@ -8165,9 +4393,16 @@
           </a:bodyPr>
           <a:lstStyle/>
           <a:p>
-            <a:r>
-              <a:rPr lang="ko-KR" altLang="en-US" dirty="0"/>
-              <a:t>분산된 상호 소통 체계</a:t>
+            <a:pPr marL="285750" indent="-285750">
+              <a:buFont typeface="Wingdings" panose="05000000000000000000" pitchFamily="2" charset="2"/>
+              <a:buChar char="l"/>
+            </a:pPr>
+            <a:r>
+              <a:rPr lang="ko-KR" altLang="en-US" sz="1600" b="1" dirty="0">
+                <a:latin typeface="KoPub돋움체 Light" panose="00000300000000000000" pitchFamily="2" charset="-127"/>
+                <a:ea typeface="KoPub돋움체 Light" panose="00000300000000000000" pitchFamily="2" charset="-127"/>
+              </a:rPr>
+              <a:t>분산된 상호 소통 채널</a:t>
             </a:r>
           </a:p>
         </p:txBody>
@@ -8186,8 +4421,8 @@
         </p:nvSpPr>
         <p:spPr>
           <a:xfrm>
-            <a:off x="4784501" y="3429000"/>
-            <a:ext cx="2194832" cy="646331"/>
+            <a:off x="3387143" y="3613131"/>
+            <a:ext cx="1739579" cy="584775"/>
           </a:xfrm>
           <a:prstGeom prst="rect">
             <a:avLst/>
@@ -8201,26 +4436,44 @@
           <a:lstStyle/>
           <a:p>
             <a:r>
-              <a:rPr lang="ko-KR" altLang="en-US" dirty="0"/>
+              <a:rPr lang="ko-KR" altLang="en-US" sz="1600" dirty="0">
+                <a:latin typeface="KoPub돋움체 Light" panose="00000300000000000000" pitchFamily="2" charset="-127"/>
+                <a:ea typeface="KoPub돋움체 Light" panose="00000300000000000000" pitchFamily="2" charset="-127"/>
+              </a:rPr>
               <a:t>전화</a:t>
             </a:r>
             <a:r>
-              <a:rPr lang="en-US" altLang="ko-KR" dirty="0"/>
+              <a:rPr lang="en-US" altLang="ko-KR" sz="1600" dirty="0">
+                <a:latin typeface="KoPub돋움체 Light" panose="00000300000000000000" pitchFamily="2" charset="-127"/>
+                <a:ea typeface="KoPub돋움체 Light" panose="00000300000000000000" pitchFamily="2" charset="-127"/>
+              </a:rPr>
               <a:t>, </a:t>
             </a:r>
             <a:r>
-              <a:rPr lang="ko-KR" altLang="en-US" dirty="0" err="1"/>
+              <a:rPr lang="ko-KR" altLang="en-US" sz="1600" dirty="0" err="1">
+                <a:latin typeface="KoPub돋움체 Light" panose="00000300000000000000" pitchFamily="2" charset="-127"/>
+                <a:ea typeface="KoPub돋움체 Light" panose="00000300000000000000" pitchFamily="2" charset="-127"/>
+              </a:rPr>
               <a:t>메시지등의</a:t>
             </a:r>
             <a:r>
-              <a:rPr lang="ko-KR" altLang="en-US" dirty="0"/>
+              <a:rPr lang="ko-KR" altLang="en-US" sz="1600" dirty="0">
+                <a:latin typeface="KoPub돋움체 Light" panose="00000300000000000000" pitchFamily="2" charset="-127"/>
+                <a:ea typeface="KoPub돋움체 Light" panose="00000300000000000000" pitchFamily="2" charset="-127"/>
+              </a:rPr>
               <a:t> </a:t>
             </a:r>
-            <a:endParaRPr lang="en-US" altLang="ko-KR" dirty="0"/>
-          </a:p>
-          <a:p>
-            <a:r>
-              <a:rPr lang="ko-KR" altLang="en-US" dirty="0"/>
+            <a:endParaRPr lang="en-US" altLang="ko-KR" sz="1600" dirty="0">
+              <a:latin typeface="KoPub돋움체 Light" panose="00000300000000000000" pitchFamily="2" charset="-127"/>
+              <a:ea typeface="KoPub돋움체 Light" panose="00000300000000000000" pitchFamily="2" charset="-127"/>
+            </a:endParaRPr>
+          </a:p>
+          <a:p>
+            <a:r>
+              <a:rPr lang="ko-KR" altLang="en-US" sz="1600" dirty="0">
+                <a:latin typeface="KoPub돋움체 Light" panose="00000300000000000000" pitchFamily="2" charset="-127"/>
+                <a:ea typeface="KoPub돋움체 Light" panose="00000300000000000000" pitchFamily="2" charset="-127"/>
+              </a:rPr>
               <a:t>비정형적 소통 의존</a:t>
             </a:r>
           </a:p>
@@ -8240,8 +4493,8 @@
         </p:nvSpPr>
         <p:spPr>
           <a:xfrm>
-            <a:off x="8371268" y="2643389"/>
-            <a:ext cx="1733167" cy="369332"/>
+            <a:off x="1204174" y="4972612"/>
+            <a:ext cx="1669047" cy="338554"/>
           </a:xfrm>
           <a:prstGeom prst="rect">
             <a:avLst/>
@@ -8254,8 +4507,15 @@
           </a:bodyPr>
           <a:lstStyle/>
           <a:p>
-            <a:r>
-              <a:rPr lang="ko-KR" altLang="en-US" dirty="0"/>
+            <a:pPr marL="285750" indent="-285750">
+              <a:buFont typeface="Wingdings" panose="05000000000000000000" pitchFamily="2" charset="2"/>
+              <a:buChar char="l"/>
+            </a:pPr>
+            <a:r>
+              <a:rPr lang="ko-KR" altLang="en-US" sz="1600" b="1" dirty="0">
+                <a:latin typeface="KoPub돋움체 Light" panose="00000300000000000000" pitchFamily="2" charset="-127"/>
+                <a:ea typeface="KoPub돋움체 Light" panose="00000300000000000000" pitchFamily="2" charset="-127"/>
+              </a:rPr>
               <a:t>업무 효율 저하</a:t>
             </a:r>
           </a:p>
@@ -8275,8 +4535,8 @@
         </p:nvSpPr>
         <p:spPr>
           <a:xfrm>
-            <a:off x="8467859" y="3152105"/>
-            <a:ext cx="2589170" cy="369332"/>
+            <a:off x="3387143" y="4849502"/>
+            <a:ext cx="2037737" cy="584775"/>
           </a:xfrm>
           <a:prstGeom prst="rect">
             <a:avLst/>
@@ -8290,18 +4550,34 @@
           <a:lstStyle/>
           <a:p>
             <a:r>
-              <a:rPr lang="ko-KR" altLang="en-US" dirty="0"/>
+              <a:rPr lang="ko-KR" altLang="en-US" sz="1600" dirty="0">
+                <a:latin typeface="KoPub돋움체 Light" panose="00000300000000000000" pitchFamily="2" charset="-127"/>
+                <a:ea typeface="KoPub돋움체 Light" panose="00000300000000000000" pitchFamily="2" charset="-127"/>
+              </a:rPr>
               <a:t>맥락 단절 및 반복 호출</a:t>
             </a:r>
-          </a:p>
-        </p:txBody>
-      </p:sp>
-      <p:sp>
-        <p:nvSpPr>
-          <p:cNvPr id="31" name="TextBox 30">
+            <a:endParaRPr lang="en-US" altLang="ko-KR" sz="1600" dirty="0">
+              <a:latin typeface="KoPub돋움체 Light" panose="00000300000000000000" pitchFamily="2" charset="-127"/>
+              <a:ea typeface="KoPub돋움체 Light" panose="00000300000000000000" pitchFamily="2" charset="-127"/>
+            </a:endParaRPr>
+          </a:p>
+          <a:p>
+            <a:r>
+              <a:rPr lang="ko-KR" altLang="en-US" sz="1600" dirty="0">
+                <a:latin typeface="KoPub돋움체 Light" panose="00000300000000000000" pitchFamily="2" charset="-127"/>
+                <a:ea typeface="KoPub돋움체 Light" panose="00000300000000000000" pitchFamily="2" charset="-127"/>
+              </a:rPr>
+              <a:t>업무 피로도 가중</a:t>
+            </a:r>
+          </a:p>
+        </p:txBody>
+      </p:sp>
+      <p:sp>
+        <p:nvSpPr>
+          <p:cNvPr id="33" name="TextBox 32">
             <a:extLst>
               <a:ext uri="{FF2B5EF4-FFF2-40B4-BE49-F238E27FC236}">
-                <a16:creationId xmlns:a16="http://schemas.microsoft.com/office/drawing/2014/main" id="{A3CBA17C-4B93-4D6B-BED6-86B9CF6550B5}"/>
+                <a16:creationId xmlns:a16="http://schemas.microsoft.com/office/drawing/2014/main" id="{4AD2F5A0-6876-4FF4-80C0-2AC977AE19FA}"/>
               </a:ext>
             </a:extLst>
           </p:cNvPr>
@@ -8310,8 +4586,8 @@
         </p:nvSpPr>
         <p:spPr>
           <a:xfrm>
-            <a:off x="8467859" y="3647942"/>
-            <a:ext cx="1963999" cy="369332"/>
+            <a:off x="7373157" y="3245476"/>
+            <a:ext cx="2936381" cy="1200329"/>
           </a:xfrm>
           <a:prstGeom prst="rect">
             <a:avLst/>
@@ -8319,24 +4595,37 @@
           <a:noFill/>
         </p:spPr>
         <p:txBody>
-          <a:bodyPr wrap="none" rtlCol="0">
+          <a:bodyPr wrap="square" rtlCol="0">
             <a:spAutoFit/>
           </a:bodyPr>
           <a:lstStyle/>
           <a:p>
+            <a:pPr fontAlgn="base"/>
+            <a:r>
+              <a:rPr lang="ko-KR" altLang="en-US" b="1" dirty="0"/>
+              <a:t>스마트 소통 프로토콜</a:t>
+            </a:r>
             <a:r>
               <a:rPr lang="ko-KR" altLang="en-US" dirty="0"/>
-              <a:t>업무 피로도 가중</a:t>
-            </a:r>
-          </a:p>
-        </p:txBody>
-      </p:sp>
-      <p:sp>
-        <p:nvSpPr>
-          <p:cNvPr id="32" name="사각형: 둥근 모서리 31">
+              <a:t>과 </a:t>
+            </a:r>
+            <a:r>
+              <a:rPr lang="ko-KR" altLang="en-US" b="1" dirty="0"/>
+              <a:t>임상 실무 시각 가이드</a:t>
+            </a:r>
+            <a:r>
+              <a:rPr lang="ko-KR" altLang="en-US" dirty="0"/>
+              <a:t>를 구축을 통하여 소통환경을 개선</a:t>
+            </a:r>
+          </a:p>
+        </p:txBody>
+      </p:sp>
+      <p:sp>
+        <p:nvSpPr>
+          <p:cNvPr id="41" name="화살표: 오른쪽 40">
             <a:extLst>
               <a:ext uri="{FF2B5EF4-FFF2-40B4-BE49-F238E27FC236}">
-                <a16:creationId xmlns:a16="http://schemas.microsoft.com/office/drawing/2014/main" id="{016CFAF4-76D0-49A6-85DD-9D10B0EC5B70}"/>
+                <a16:creationId xmlns:a16="http://schemas.microsoft.com/office/drawing/2014/main" id="{41CDE4D3-42F7-4FF4-A9A9-B000D25AECCF}"/>
               </a:ext>
             </a:extLst>
           </p:cNvPr>
@@ -8345,24 +4634,12 @@
         </p:nvSpPr>
         <p:spPr>
           <a:xfrm>
-            <a:off x="1049908" y="4662151"/>
-            <a:ext cx="10199787" cy="1689267"/>
+            <a:off x="6381482" y="3657599"/>
+            <a:ext cx="546017" cy="425003"/>
           </a:xfrm>
-          <a:prstGeom prst="roundRect">
-            <a:avLst>
-              <a:gd name="adj" fmla="val 4426"/>
-            </a:avLst>
+          <a:prstGeom prst="rightArrow">
+            <a:avLst/>
           </a:prstGeom>
-          <a:solidFill>
-            <a:schemeClr val="bg1"/>
-          </a:solidFill>
-          <a:ln>
-            <a:solidFill>
-              <a:schemeClr val="bg1">
-                <a:lumMod val="95000"/>
-              </a:schemeClr>
-            </a:solidFill>
-          </a:ln>
         </p:spPr>
         <p:style>
           <a:lnRef idx="2">
@@ -8442,11 +4719,11 @@
           <a:p>
             <a:r>
               <a:rPr lang="en-US" altLang="ko-KR" dirty="0"/>
-              <a:t>2. </a:t>
+              <a:t>3. </a:t>
             </a:r>
             <a:r>
               <a:rPr lang="ko-KR" altLang="en-US" dirty="0"/>
-              <a:t>활동의 필요성</a:t>
+              <a:t>문제분석</a:t>
             </a:r>
           </a:p>
         </p:txBody>
@@ -8454,7 +4731,7 @@
     </p:spTree>
     <p:extLst>
       <p:ext uri="{BB962C8B-B14F-4D97-AF65-F5344CB8AC3E}">
-        <p14:creationId xmlns:p14="http://schemas.microsoft.com/office/powerpoint/2010/main" val="337199813"/>
+        <p14:creationId xmlns:p14="http://schemas.microsoft.com/office/powerpoint/2010/main" val="2964779207"/>
       </p:ext>
     </p:extLst>
   </p:cSld>
@@ -8504,11 +4781,11 @@
           <a:p>
             <a:r>
               <a:rPr lang="en-US" altLang="ko-KR" dirty="0"/>
-              <a:t>3. </a:t>
+              <a:t>4. </a:t>
             </a:r>
             <a:r>
               <a:rPr lang="ko-KR" altLang="en-US" dirty="0"/>
-              <a:t>문제분석</a:t>
+              <a:t>목표 및 핵심지표</a:t>
             </a:r>
           </a:p>
         </p:txBody>
@@ -8516,7 +4793,7 @@
     </p:spTree>
     <p:extLst>
       <p:ext uri="{BB962C8B-B14F-4D97-AF65-F5344CB8AC3E}">
-        <p14:creationId xmlns:p14="http://schemas.microsoft.com/office/powerpoint/2010/main" val="2964779207"/>
+        <p14:creationId xmlns:p14="http://schemas.microsoft.com/office/powerpoint/2010/main" val="4203069552"/>
       </p:ext>
     </p:extLst>
   </p:cSld>
@@ -8566,68 +4843,6 @@
           <a:p>
             <a:r>
               <a:rPr lang="en-US" altLang="ko-KR" dirty="0"/>
-              <a:t>4. </a:t>
-            </a:r>
-            <a:r>
-              <a:rPr lang="ko-KR" altLang="en-US" dirty="0"/>
-              <a:t>목표 및 핵심지표</a:t>
-            </a:r>
-          </a:p>
-        </p:txBody>
-      </p:sp>
-    </p:spTree>
-    <p:extLst>
-      <p:ext uri="{BB962C8B-B14F-4D97-AF65-F5344CB8AC3E}">
-        <p14:creationId xmlns:p14="http://schemas.microsoft.com/office/powerpoint/2010/main" val="4203069552"/>
-      </p:ext>
-    </p:extLst>
-  </p:cSld>
-  <p:clrMapOvr>
-    <a:masterClrMapping/>
-  </p:clrMapOvr>
-</p:sld>
-</file>
-
-<file path=ppt/slides/slide8.xml><?xml version="1.0" encoding="utf-8"?>
-<p:sld xmlns:a="http://schemas.openxmlformats.org/drawingml/2006/main" xmlns:r="http://schemas.openxmlformats.org/officeDocument/2006/relationships" xmlns:p="http://schemas.openxmlformats.org/presentationml/2006/main">
-  <p:cSld>
-    <p:spTree>
-      <p:nvGrpSpPr>
-        <p:cNvPr id="1" name=""/>
-        <p:cNvGrpSpPr/>
-        <p:nvPr/>
-      </p:nvGrpSpPr>
-      <p:grpSpPr>
-        <a:xfrm>
-          <a:off x="0" y="0"/>
-          <a:ext cx="0" cy="0"/>
-          <a:chOff x="0" y="0"/>
-          <a:chExt cx="0" cy="0"/>
-        </a:xfrm>
-      </p:grpSpPr>
-      <p:sp>
-        <p:nvSpPr>
-          <p:cNvPr id="2" name="제목 1">
-            <a:extLst>
-              <a:ext uri="{FF2B5EF4-FFF2-40B4-BE49-F238E27FC236}">
-                <a16:creationId xmlns:a16="http://schemas.microsoft.com/office/drawing/2014/main" id="{E8D51D1B-0DB5-A282-D99E-57AC7CC3D2E1}"/>
-              </a:ext>
-            </a:extLst>
-          </p:cNvPr>
-          <p:cNvSpPr>
-            <a:spLocks noGrp="1"/>
-          </p:cNvSpPr>
-          <p:nvPr>
-            <p:ph type="title"/>
-          </p:nvPr>
-        </p:nvSpPr>
-        <p:spPr/>
-        <p:txBody>
-          <a:bodyPr/>
-          <a:lstStyle/>
-          <a:p>
-            <a:r>
-              <a:rPr lang="en-US" altLang="ko-KR" dirty="0"/>
               <a:t>5. </a:t>
             </a:r>
             <a:r>
@@ -8650,7 +4865,7 @@
 </p:sld>
 </file>
 
-<file path=ppt/slides/slide9.xml><?xml version="1.0" encoding="utf-8"?>
+<file path=ppt/slides/slide8.xml><?xml version="1.0" encoding="utf-8"?>
 <p:sld xmlns:a="http://schemas.openxmlformats.org/drawingml/2006/main" xmlns:r="http://schemas.openxmlformats.org/officeDocument/2006/relationships" xmlns:p="http://schemas.openxmlformats.org/presentationml/2006/main">
   <p:cSld>
     <p:spTree>

--- a/documents/중간보고/2026QI_WeValue우리가치 중간보고.pptx
+++ b/documents/중간보고/2026QI_WeValue우리가치 중간보고.pptx
@@ -11,7 +11,7 @@
     <p:sldId id="256" r:id="rId2"/>
     <p:sldId id="269" r:id="rId3"/>
     <p:sldId id="310" r:id="rId4"/>
-    <p:sldId id="311" r:id="rId5"/>
+    <p:sldId id="315" r:id="rId5"/>
     <p:sldId id="312" r:id="rId6"/>
     <p:sldId id="313" r:id="rId7"/>
     <p:sldId id="314" r:id="rId8"/>
@@ -843,7 +843,7 @@
     </p:spTree>
     <p:extLst>
       <p:ext uri="{BB962C8B-B14F-4D97-AF65-F5344CB8AC3E}">
-        <p14:creationId xmlns:p14="http://schemas.microsoft.com/office/powerpoint/2010/main" val="2192738890"/>
+        <p14:creationId xmlns:p14="http://schemas.microsoft.com/office/powerpoint/2010/main" val="4235659151"/>
       </p:ext>
     </p:extLst>
   </p:cSld>
@@ -4669,7 +4669,7 @@
     </p:spTree>
     <p:extLst>
       <p:ext uri="{BB962C8B-B14F-4D97-AF65-F5344CB8AC3E}">
-        <p14:creationId xmlns:p14="http://schemas.microsoft.com/office/powerpoint/2010/main" val="1428484771"/>
+        <p14:creationId xmlns:p14="http://schemas.microsoft.com/office/powerpoint/2010/main" val="1289794206"/>
       </p:ext>
     </p:extLst>
   </p:cSld>
